--- a/content/2026-2/cea055-estatistica-probabilidade/14-populacao-amostra-parametros/Aula_14_Populacao_Amostra_Parametros.pptx
+++ b/content/2026-2/cea055-estatistica-probabilidade/14-populacao-amostra-parametros/Aula_14_Populacao_Amostra_Parametros.pptx
@@ -3879,7 +3879,7 @@
             </a:br>
             <a:r>
               <a:rPr lang="pt-BR" sz="2200" b="1" dirty="0"/>
-              <a:t>Inferência Estatística</a:t>
+              <a:t>População, Amostra e Parâmetros</a:t>
             </a:r>
             <a:endParaRPr lang="pt-BR" dirty="0">
               <a:latin typeface="AlternateGothic2 BT" panose="020B0608020202050204" pitchFamily="34" charset="0"/>
@@ -3901,8 +3901,8 @@
         </p:nvSpPr>
         <p:spPr>
           <a:xfrm>
-            <a:off x="650241" y="1506234"/>
-            <a:ext cx="10908714" cy="3970318"/>
+            <a:off x="881687" y="1441868"/>
+            <a:ext cx="10067277" cy="4295185"/>
           </a:xfrm>
           <a:prstGeom prst="rect">
             <a:avLst/>
@@ -3916,8 +3916,8 @@
           <a:lstStyle/>
           <a:p>
             <a:r>
-              <a:rPr lang="pt-BR" sz="2800" b="1" dirty="0"/>
-              <a:t>Introdução</a:t>
+              <a:rPr lang="pt-BR" sz="2400" b="1" dirty="0"/>
+              <a:t>Objetivos do aula:</a:t>
             </a:r>
           </a:p>
           <a:p>
@@ -3925,7 +3925,10 @@
               <a:buFont typeface="Arial" panose="020B0604020202020204" pitchFamily="34" charset="0"/>
               <a:buChar char="•"/>
             </a:pPr>
-            <a:endParaRPr lang="pt-BR" sz="2800" dirty="0"/>
+            <a:r>
+              <a:rPr lang="pt-BR" sz="2400" dirty="0"/>
+              <a:t>Compreender os conceitos de população e amostra.</a:t>
+            </a:r>
           </a:p>
           <a:p>
             <a:pPr marL="285737" indent="-285737">
@@ -3933,8 +3936,8 @@
               <a:buChar char="•"/>
             </a:pPr>
             <a:r>
-              <a:rPr lang="pt-BR" sz="2800" dirty="0"/>
-              <a:t>Na Parte 1 - Resumo dos dados.</a:t>
+              <a:rPr lang="pt-BR" sz="2400" dirty="0"/>
+              <a:t>Conhecer os tipos de amostragem, com foco na Amostragem Aleatória Simples (AAS).</a:t>
             </a:r>
           </a:p>
           <a:p>
@@ -3943,28 +3946,86 @@
               <a:buChar char="•"/>
             </a:pPr>
             <a:r>
-              <a:rPr lang="pt-BR" sz="2800" dirty="0"/>
-              <a:t>Na Parte 2 - Modelos teóricos (probabilísticos).</a:t>
-            </a:r>
-          </a:p>
-          <a:p>
-            <a:pPr marL="285737" indent="-285737">
+              <a:rPr lang="pt-BR" sz="2400" dirty="0"/>
+              <a:t>Diferenciar estatística (medida da amostra) de parâmetro (medida da população).</a:t>
+            </a:r>
+          </a:p>
+          <a:p>
+            <a:r>
+              <a:rPr lang="pt-BR" sz="2400" b="1" dirty="0"/>
+              <a:t xml:space="preserve">Referências: </a:t>
+            </a:r>
+          </a:p>
+          <a:p>
+            <a:pPr marL="457178" indent="-457178">
               <a:buFont typeface="Arial" panose="020B0604020202020204" pitchFamily="34" charset="0"/>
               <a:buChar char="•"/>
             </a:pPr>
-            <a:endParaRPr lang="pt-BR" sz="2800" dirty="0"/>
-          </a:p>
-          <a:p>
-            <a:pPr marL="285737" indent="-285737">
+            <a:r>
+              <a:rPr lang="pt-BR" sz="2000" dirty="0"/>
+              <a:t xml:space="preserve">Bussab, Morettin. </a:t>
+            </a:r>
+            <a:r>
+              <a:rPr lang="pt-BR" sz="2000" b="1" dirty="0"/>
+              <a:t>Estatística Básica</a:t>
+            </a:r>
+            <a:r>
+              <a:rPr lang="pt-BR" sz="2000" dirty="0"/>
+              <a:t>, 9ed — Cap. 10 (10.2, 10.4, 10.5, 10.6)</a:t>
+            </a:r>
+          </a:p>
+          <a:p>
+            <a:pPr marL="457178" indent="-457178">
               <a:buFont typeface="Arial" panose="020B0604020202020204" pitchFamily="34" charset="0"/>
               <a:buChar char="•"/>
             </a:pPr>
-            <a:endParaRPr lang="pt-BR" sz="2800" dirty="0"/>
-          </a:p>
-          <a:p>
-            <a:r>
-              <a:rPr lang="pt-BR" sz="2800" dirty="0"/>
-              <a:t>Nesta terceira parte apresentaremos os argumentos estatísticos para fazer afirmações sobre as características de uma população, com base em informações dadas por amostras.</a:t>
+            <a:r>
+              <a:rPr lang="pt-BR" sz="2000" dirty="0"/>
+              <a:t xml:space="preserve">Montgomery, Runger. </a:t>
+            </a:r>
+            <a:r>
+              <a:rPr lang="pt-BR" sz="2000" b="1" dirty="0"/>
+              <a:t>Applied Statistics and Probability for Engineers</a:t>
+            </a:r>
+            <a:r>
+              <a:rPr lang="pt-BR" sz="2000" dirty="0"/>
+              <a:t>, 7th ed — Cap. 7 (7.1)</a:t>
+            </a:r>
+          </a:p>
+          <a:p>
+            <a:pPr marL="457178" indent="-457178">
+              <a:buFont typeface="Arial" panose="020B0604020202020204" pitchFamily="34" charset="0"/>
+              <a:buChar char="•"/>
+            </a:pPr>
+            <a:r>
+              <a:rPr lang="pt-BR" sz="2000" dirty="0"/>
+              <a:t xml:space="preserve">Magalhães, Lima. </a:t>
+            </a:r>
+            <a:r>
+              <a:rPr lang="pt-BR" sz="2000" b="1" dirty="0"/>
+              <a:t>Noções de Probabilidade e Estatística</a:t>
+            </a:r>
+            <a:r>
+              <a:rPr lang="pt-BR" sz="2000" dirty="0"/>
+              <a:t>, 5ed — Cap. 7 (7.1, 7.2)</a:t>
+            </a:r>
+          </a:p>
+          <a:p>
+            <a:pPr marL="457178" indent="-457178">
+              <a:buFont typeface="Arial" panose="020B0604020202020204" pitchFamily="34" charset="0"/>
+              <a:buChar char="•"/>
+            </a:pPr>
+            <a:r>
+              <a:rPr lang="pt-BR" sz="2000" dirty="0"/>
+              <a:t xml:space="preserve">Morettin. </a:t>
+            </a:r>
+            <a:r>
+              <a:rPr lang="pt-BR" sz="2000" b="1" dirty="0"/>
+              <a:t>Estatística Básica: Probabilidade e Inferência</a:t>
+            </a:r>
+            <a:r>
+              <a:rPr lang="pt-BR" sz="2000" dirty="0"/>
+              <a:t xml:space="preserve"> — Cap. 7 (7.1, 7.2); Cap. 8 (8.1)</a:t>
             </a:r>
           </a:p>
         </p:txBody>
@@ -4043,7 +4104,7 @@
     </p:spTree>
     <p:extLst>
       <p:ext uri="{BB962C8B-B14F-4D97-AF65-F5344CB8AC3E}">
-        <p14:creationId xmlns:p14="http://schemas.microsoft.com/office/powerpoint/2010/main" val="174771625"/>
+        <p14:creationId xmlns:p14="http://schemas.microsoft.com/office/powerpoint/2010/main" val="1670738953"/>
       </p:ext>
     </p:extLst>
   </p:cSld>
@@ -4070,56 +4131,288 @@
           <a:chExt cx="0" cy="0"/>
         </a:xfrm>
       </p:grpSpPr>
-      <p:sp>
-        <p:nvSpPr>
-          <p:cNvPr id="2" name="Título 1">
+      <mc:AlternateContent xmlns:mc="http://schemas.openxmlformats.org/markup-compatibility/2006" xmlns:a14="http://schemas.microsoft.com/office/drawing/2010/main">
+        <mc:Choice Requires="a14">
+          <p:sp>
+            <p:nvSpPr>
+              <p:cNvPr id="6" name="CaixaDeTexto 5">
+                <a:extLst>
+                  <a:ext uri="{FF2B5EF4-FFF2-40B4-BE49-F238E27FC236}">
+                    <a16:creationId xmlns:a16="http://schemas.microsoft.com/office/drawing/2014/main" id="{720B10DA-C761-4DEE-8D86-E170E1C2E981}"/>
+                  </a:ext>
+                </a:extLst>
+              </p:cNvPr>
+              <p:cNvSpPr txBox="1"/>
+              <p:nvPr/>
+            </p:nvSpPr>
+            <p:spPr>
+              <a:xfrm>
+                <a:off x="650241" y="1506234"/>
+                <a:ext cx="10908714" cy="4401205"/>
+              </a:xfrm>
+              <a:prstGeom prst="rect">
+                <a:avLst/>
+              </a:prstGeom>
+              <a:noFill/>
+            </p:spPr>
+            <p:txBody>
+              <a:bodyPr wrap="square" rtlCol="0">
+                <a:spAutoFit/>
+              </a:bodyPr>
+              <a:lstStyle/>
+              <a:p>
+                <a:pPr marL="514350" indent="-514350">
+                  <a:buFont typeface="+mj-lt"/>
+                  <a:buAutoNum type="arabicParenR" startAt="3"/>
+                </a:pPr>
+                <a:r>
+                  <a:rPr lang="pt-BR" sz="2800" dirty="0"/>
+                  <a:t xml:space="preserve">Considere uma máquina que embala automaticamente café em pacotes de 500g. Digamos que </a:t>
+                </a:r>
+                <a14:m>
+                  <m:oMath xmlns:m="http://schemas.openxmlformats.org/officeDocument/2006/math">
+                    <m:r>
+                      <a:rPr lang="pt-BR" sz="2800" i="1" dirty="0" smtClean="0">
+                        <a:latin typeface="Cambria Math" panose="02040503050406030204" pitchFamily="18" charset="0"/>
+                      </a:rPr>
+                      <m:t>𝑋</m:t>
+                    </m:r>
+                  </m:oMath>
+                </a14:m>
+                <a:r>
+                  <a:rPr lang="pt-BR" sz="2800" dirty="0"/>
+                  <a:t xml:space="preserve"> represente o peso dos pacotes. Sabe-se que a distribuição de </a:t>
+                </a:r>
+                <a14:m>
+                  <m:oMath xmlns:m="http://schemas.openxmlformats.org/officeDocument/2006/math">
+                    <m:r>
+                      <a:rPr lang="pt-BR" sz="2800" i="1" dirty="0" smtClean="0">
+                        <a:latin typeface="Cambria Math" panose="02040503050406030204" pitchFamily="18" charset="0"/>
+                      </a:rPr>
+                      <m:t>𝑋</m:t>
+                    </m:r>
+                  </m:oMath>
+                </a14:m>
+                <a:r>
+                  <a:rPr lang="pt-BR" sz="2800" dirty="0"/>
+                  <a:t xml:space="preserve"> pode ser representada por uma normal, com parâmetros </a:t>
+                </a:r>
+                <a14:m>
+                  <m:oMath xmlns:m="http://schemas.openxmlformats.org/officeDocument/2006/math">
+                    <m:r>
+                      <a:rPr lang="pt-BR" sz="2800" b="0" i="1" smtClean="0">
+                        <a:latin typeface="Cambria Math" panose="02040503050406030204" pitchFamily="18" charset="0"/>
+                      </a:rPr>
+                      <m:t>𝜇</m:t>
+                    </m:r>
+                    <m:r>
+                      <a:rPr lang="pt-BR" sz="2800" b="0" i="1" smtClean="0">
+                        <a:latin typeface="Cambria Math" panose="02040503050406030204" pitchFamily="18" charset="0"/>
+                      </a:rPr>
+                      <m:t> </m:t>
+                    </m:r>
+                  </m:oMath>
+                </a14:m>
+                <a:r>
+                  <a:rPr lang="pt-BR" sz="2800" dirty="0"/>
+                  <a:t xml:space="preserve">e </a:t>
+                </a:r>
+                <a14:m>
+                  <m:oMath xmlns:m="http://schemas.openxmlformats.org/officeDocument/2006/math">
+                    <m:sSup>
+                      <m:sSupPr>
+                        <m:ctrlPr>
+                          <a:rPr lang="pt-BR" sz="2800" i="1">
+                            <a:latin typeface="Cambria Math" panose="02040503050406030204" pitchFamily="18" charset="0"/>
+                          </a:rPr>
+                        </m:ctrlPr>
+                      </m:sSupPr>
+                      <m:e>
+                        <m:r>
+                          <a:rPr lang="pt-BR" sz="2800" i="1">
+                            <a:latin typeface="Cambria Math" panose="02040503050406030204" pitchFamily="18" charset="0"/>
+                          </a:rPr>
+                          <m:t>𝜎</m:t>
+                        </m:r>
+                      </m:e>
+                      <m:sup>
+                        <m:r>
+                          <a:rPr lang="pt-BR" sz="2800" i="1">
+                            <a:latin typeface="Cambria Math" panose="02040503050406030204" pitchFamily="18" charset="0"/>
+                          </a:rPr>
+                          <m:t>2</m:t>
+                        </m:r>
+                      </m:sup>
+                    </m:sSup>
+                  </m:oMath>
+                </a14:m>
+                <a:r>
+                  <a:rPr lang="pt-BR" sz="2800" dirty="0"/>
+                  <a:t>desconhecidos. Calcularemos esses parâmetros a partir de 100 pacotes sorteados.</a:t>
+                </a:r>
+              </a:p>
+              <a:p>
+                <a:pPr marL="457200" indent="-457200">
+                  <a:buFont typeface="Arial" panose="020B0604020202020204" pitchFamily="34" charset="0"/>
+                  <a:buChar char="•"/>
+                </a:pPr>
+                <a:endParaRPr lang="pt-BR" sz="2800" dirty="0"/>
+              </a:p>
+              <a:p>
+                <a:pPr marL="457200" indent="-457200">
+                  <a:buFont typeface="Arial" panose="020B0604020202020204" pitchFamily="34" charset="0"/>
+                  <a:buChar char="•"/>
+                </a:pPr>
+                <a:r>
+                  <a:rPr lang="pt-BR" sz="2800" b="1" dirty="0"/>
+                  <a:t xml:space="preserve">A variável </a:t>
+                </a:r>
+                <a:r>
+                  <a:rPr lang="pt-BR" sz="2800" dirty="0"/>
+                  <a:t>é o peso dos pacotes (supostamente normal).</a:t>
+                </a:r>
+              </a:p>
+              <a:p>
+                <a:pPr marL="457200" indent="-457200">
+                  <a:buFont typeface="Arial" panose="020B0604020202020204" pitchFamily="34" charset="0"/>
+                  <a:buChar char="•"/>
+                </a:pPr>
+                <a:r>
+                  <a:rPr lang="pt-BR" sz="2800" b="1" dirty="0"/>
+                  <a:t xml:space="preserve">A população </a:t>
+                </a:r>
+                <a:r>
+                  <a:rPr lang="pt-BR" sz="2800" dirty="0"/>
+                  <a:t>é o conjunto de todos os pacotes enchidos ou que virão a ser enchidos pela máquina.</a:t>
+                </a:r>
+              </a:p>
+              <a:p>
+                <a:pPr marL="457200" indent="-457200">
+                  <a:buFont typeface="Arial" panose="020B0604020202020204" pitchFamily="34" charset="0"/>
+                  <a:buChar char="•"/>
+                </a:pPr>
+                <a:r>
+                  <a:rPr lang="pt-BR" sz="2800" b="1" dirty="0"/>
+                  <a:t xml:space="preserve">A amostra </a:t>
+                </a:r>
+                <a:r>
+                  <a:rPr lang="pt-BR" sz="2800" dirty="0"/>
+                  <a:t>são os 100 pacotes sorteados.</a:t>
+                </a:r>
+              </a:p>
+            </p:txBody>
+          </p:sp>
+        </mc:Choice>
+        <mc:Fallback xmlns="">
+          <p:sp>
+            <p:nvSpPr>
+              <p:cNvPr id="6" name="CaixaDeTexto 5">
+                <a:extLst>
+                  <a:ext uri="{FF2B5EF4-FFF2-40B4-BE49-F238E27FC236}">
+                    <a16:creationId xmlns:a16="http://schemas.microsoft.com/office/drawing/2014/main" id="{720B10DA-C761-4DEE-8D86-E170E1C2E981}"/>
+                  </a:ext>
+                </a:extLst>
+              </p:cNvPr>
+              <p:cNvSpPr txBox="1">
+                <a:spLocks noRot="1" noChangeAspect="1" noMove="1" noResize="1" noEditPoints="1" noAdjustHandles="1" noChangeArrowheads="1" noChangeShapeType="1" noTextEdit="1"/>
+              </p:cNvSpPr>
+              <p:nvPr/>
+            </p:nvSpPr>
+            <p:spPr>
+              <a:xfrm>
+                <a:off x="650241" y="1506234"/>
+                <a:ext cx="10908714" cy="4401205"/>
+              </a:xfrm>
+              <a:prstGeom prst="rect">
+                <a:avLst/>
+              </a:prstGeom>
+              <a:blipFill>
+                <a:blip r:embed="rId2"/>
+                <a:stretch>
+                  <a:fillRect l="-1174" t="-1524" r="-1174" b="-3047"/>
+                </a:stretch>
+              </a:blipFill>
+            </p:spPr>
+            <p:txBody>
+              <a:bodyPr/>
+              <a:lstStyle/>
+              <a:p>
+                <a:r>
+                  <a:rPr lang="pt-BR">
+                    <a:noFill/>
+                  </a:rPr>
+                  <a:t> </a:t>
+                </a:r>
+              </a:p>
+            </p:txBody>
+          </p:sp>
+        </mc:Fallback>
+      </mc:AlternateContent>
+      <p:sp>
+        <p:nvSpPr>
+          <p:cNvPr id="3" name="CaixaDeTexto 2">
             <a:extLst>
               <a:ext uri="{FF2B5EF4-FFF2-40B4-BE49-F238E27FC236}">
-                <a16:creationId xmlns:a16="http://schemas.microsoft.com/office/drawing/2014/main" id="{BC798918-7CB4-450A-A042-F0B538CA25DE}"/>
+                <a16:creationId xmlns:a16="http://schemas.microsoft.com/office/drawing/2014/main" id="{19131A04-B5D6-4211-8B49-4615DE5797E9}"/>
               </a:ext>
             </a:extLst>
           </p:cNvPr>
-          <p:cNvSpPr>
-            <a:spLocks noGrp="1"/>
-          </p:cNvSpPr>
-          <p:nvPr>
-            <p:ph type="title"/>
-          </p:nvPr>
+          <p:cNvSpPr txBox="1"/>
+          <p:nvPr/>
         </p:nvSpPr>
         <p:spPr>
           <a:xfrm>
-            <a:off x="1032611" y="0"/>
-            <a:ext cx="10827959" cy="1574800"/>
+            <a:off x="361395" y="6488668"/>
+            <a:ext cx="7620000" cy="300210"/>
           </a:xfrm>
+          <a:prstGeom prst="rect">
+            <a:avLst/>
+          </a:prstGeom>
+          <a:noFill/>
         </p:spPr>
         <p:txBody>
-          <a:bodyPr>
-            <a:normAutofit/>
+          <a:bodyPr wrap="none" rtlCol="0">
+            <a:spAutoFit/>
           </a:bodyPr>
           <a:lstStyle/>
           <a:p>
-            <a:pPr algn="ctr"/>
-            <a:r>
-              <a:rPr lang="pt-BR" dirty="0">
-                <a:latin typeface="AlternateGothic2 BT" panose="020B0608020202050204" pitchFamily="34" charset="0"/>
-              </a:rPr>
-              <a:t>CEA055 – Estatística e Probabilidade</a:t>
-            </a:r>
-            <a:br>
-              <a:rPr lang="pt-BR" dirty="0">
-                <a:latin typeface="AlternateGothic2 BT" panose="020B0608020202050204" pitchFamily="34" charset="0"/>
-              </a:rPr>
-            </a:br>
-            <a:r>
-              <a:rPr lang="pt-BR" sz="2200" b="1" dirty="0"/>
-              <a:t>Inferência Estatística</a:t>
-            </a:r>
-            <a:endParaRPr lang="pt-BR" dirty="0">
-              <a:latin typeface="AlternateGothic2 BT" panose="020B0608020202050204" pitchFamily="34" charset="0"/>
-            </a:endParaRPr>
+            <a:r>
+              <a:rPr lang="pt-BR" sz="1351" dirty="0"/>
+              <a:t>CEA055 - Estatística e Probabilidade - Professor: Marcos Goulart Lima</a:t>
+            </a:r>
           </a:p>
         </p:txBody>
       </p:sp>
+    </p:spTree>
+    <p:extLst>
+      <p:ext uri="{BB962C8B-B14F-4D97-AF65-F5344CB8AC3E}">
+        <p14:creationId xmlns:p14="http://schemas.microsoft.com/office/powerpoint/2010/main" val="3067955293"/>
+      </p:ext>
+    </p:extLst>
+  </p:cSld>
+  <p:clrMapOvr>
+    <a:masterClrMapping/>
+  </p:clrMapOvr>
+</p:sld>
+</file>
+
+<file path=ppt/slides/slide11.xml><?xml version="1.0" encoding="utf-8"?>
+<p:sld xmlns:a="http://schemas.openxmlformats.org/drawingml/2006/main" xmlns:r="http://schemas.openxmlformats.org/officeDocument/2006/relationships" xmlns:p="http://schemas.openxmlformats.org/presentationml/2006/main">
+  <p:cSld>
+    <p:spTree>
+      <p:nvGrpSpPr>
+        <p:cNvPr id="1" name=""/>
+        <p:cNvGrpSpPr/>
+        <p:nvPr/>
+      </p:nvGrpSpPr>
+      <p:grpSpPr>
+        <a:xfrm>
+          <a:off x="0" y="0"/>
+          <a:ext cx="0" cy="0"/>
+          <a:chOff x="0" y="0"/>
+          <a:chExt cx="0" cy="0"/>
+        </a:xfrm>
+      </p:grpSpPr>
       <mc:AlternateContent xmlns:mc="http://schemas.openxmlformats.org/markup-compatibility/2006" xmlns:a14="http://schemas.microsoft.com/office/drawing/2010/main">
         <mc:Choice Requires="a14">
           <p:sp>
@@ -4532,7 +4825,7 @@
         <p:spPr>
           <a:xfrm>
             <a:off x="361395" y="6488668"/>
-            <a:ext cx="2395336" cy="300210"/>
+            <a:ext cx="7620000" cy="300210"/>
           </a:xfrm>
           <a:prstGeom prst="rect">
             <a:avLst/>
@@ -4547,47 +4840,11 @@
           <a:p>
             <a:r>
               <a:rPr lang="pt-BR" sz="1351" dirty="0"/>
-              <a:t>Professor: Marcos Goulart Lima</a:t>
+              <a:t>CEA055 - Estatística e Probabilidade - Professor: Marcos Goulart Lima</a:t>
             </a:r>
           </a:p>
         </p:txBody>
       </p:sp>
-      <p:pic>
-        <p:nvPicPr>
-          <p:cNvPr id="8" name="Espaço Reservado para Conteúdo 4">
-            <a:extLst>
-              <a:ext uri="{FF2B5EF4-FFF2-40B4-BE49-F238E27FC236}">
-                <a16:creationId xmlns:a16="http://schemas.microsoft.com/office/drawing/2014/main" id="{65AB402D-D1A8-4F31-BA42-34A6F0FC69F9}"/>
-              </a:ext>
-            </a:extLst>
-          </p:cNvPr>
-          <p:cNvPicPr>
-            <a:picLocks noChangeAspect="1"/>
-          </p:cNvPicPr>
-          <p:nvPr/>
-        </p:nvPicPr>
-        <p:blipFill>
-          <a:blip r:embed="rId3">
-            <a:extLst>
-              <a:ext uri="{28A0092B-C50C-407E-A947-70E740481C1C}">
-                <a14:useLocalDpi xmlns:a14="http://schemas.microsoft.com/office/drawing/2010/main" val="0"/>
-              </a:ext>
-            </a:extLst>
-          </a:blip>
-          <a:stretch>
-            <a:fillRect/>
-          </a:stretch>
-        </p:blipFill>
-        <p:spPr>
-          <a:xfrm>
-            <a:off x="62144" y="112237"/>
-            <a:ext cx="588096" cy="1228523"/>
-          </a:xfrm>
-          <a:prstGeom prst="rect">
-            <a:avLst/>
-          </a:prstGeom>
-        </p:spPr>
-      </p:pic>
     </p:spTree>
     <p:extLst>
       <p:ext uri="{BB962C8B-B14F-4D97-AF65-F5344CB8AC3E}">
@@ -4601,7 +4858,7 @@
 </p:sld>
 </file>
 
-<file path=ppt/slides/slide11.xml><?xml version="1.0" encoding="utf-8"?>
+<file path=ppt/slides/slide12.xml><?xml version="1.0" encoding="utf-8"?>
 <p:sld xmlns:a="http://schemas.openxmlformats.org/drawingml/2006/main" xmlns:r="http://schemas.openxmlformats.org/officeDocument/2006/relationships" xmlns:p="http://schemas.openxmlformats.org/presentationml/2006/main">
   <p:cSld>
     <p:spTree>
@@ -4618,56 +4875,6 @@
           <a:chExt cx="0" cy="0"/>
         </a:xfrm>
       </p:grpSpPr>
-      <p:sp>
-        <p:nvSpPr>
-          <p:cNvPr id="2" name="Título 1">
-            <a:extLst>
-              <a:ext uri="{FF2B5EF4-FFF2-40B4-BE49-F238E27FC236}">
-                <a16:creationId xmlns:a16="http://schemas.microsoft.com/office/drawing/2014/main" id="{BC798918-7CB4-450A-A042-F0B538CA25DE}"/>
-              </a:ext>
-            </a:extLst>
-          </p:cNvPr>
-          <p:cNvSpPr>
-            <a:spLocks noGrp="1"/>
-          </p:cNvSpPr>
-          <p:nvPr>
-            <p:ph type="title"/>
-          </p:nvPr>
-        </p:nvSpPr>
-        <p:spPr>
-          <a:xfrm>
-            <a:off x="1032611" y="0"/>
-            <a:ext cx="10827959" cy="1574800"/>
-          </a:xfrm>
-        </p:spPr>
-        <p:txBody>
-          <a:bodyPr>
-            <a:normAutofit/>
-          </a:bodyPr>
-          <a:lstStyle/>
-          <a:p>
-            <a:pPr algn="ctr"/>
-            <a:r>
-              <a:rPr lang="pt-BR" dirty="0">
-                <a:latin typeface="AlternateGothic2 BT" panose="020B0608020202050204" pitchFamily="34" charset="0"/>
-              </a:rPr>
-              <a:t>CEA055 – Estatística e Probabilidade</a:t>
-            </a:r>
-            <a:br>
-              <a:rPr lang="pt-BR" dirty="0">
-                <a:latin typeface="AlternateGothic2 BT" panose="020B0608020202050204" pitchFamily="34" charset="0"/>
-              </a:rPr>
-            </a:br>
-            <a:r>
-              <a:rPr lang="pt-BR" sz="2200" b="1" dirty="0"/>
-              <a:t>Inferência Estatística</a:t>
-            </a:r>
-            <a:endParaRPr lang="pt-BR" dirty="0">
-              <a:latin typeface="AlternateGothic2 BT" panose="020B0608020202050204" pitchFamily="34" charset="0"/>
-            </a:endParaRPr>
-          </a:p>
-        </p:txBody>
-      </p:sp>
       <mc:AlternateContent xmlns:mc="http://schemas.openxmlformats.org/markup-compatibility/2006">
         <mc:Choice xmlns:a14="http://schemas.microsoft.com/office/drawing/2010/main" Requires="a14">
           <p:sp>
@@ -5285,7 +5492,7 @@
         <p:spPr>
           <a:xfrm>
             <a:off x="361395" y="6488668"/>
-            <a:ext cx="2395336" cy="300210"/>
+            <a:ext cx="7620000" cy="300210"/>
           </a:xfrm>
           <a:prstGeom prst="rect">
             <a:avLst/>
@@ -5300,47 +5507,11 @@
           <a:p>
             <a:r>
               <a:rPr lang="pt-BR" sz="1351" dirty="0"/>
-              <a:t>Professor: Marcos Goulart Lima</a:t>
+              <a:t>CEA055 - Estatística e Probabilidade - Professor: Marcos Goulart Lima</a:t>
             </a:r>
           </a:p>
         </p:txBody>
       </p:sp>
-      <p:pic>
-        <p:nvPicPr>
-          <p:cNvPr id="8" name="Espaço Reservado para Conteúdo 4">
-            <a:extLst>
-              <a:ext uri="{FF2B5EF4-FFF2-40B4-BE49-F238E27FC236}">
-                <a16:creationId xmlns:a16="http://schemas.microsoft.com/office/drawing/2014/main" id="{65AB402D-D1A8-4F31-BA42-34A6F0FC69F9}"/>
-              </a:ext>
-            </a:extLst>
-          </p:cNvPr>
-          <p:cNvPicPr>
-            <a:picLocks noChangeAspect="1"/>
-          </p:cNvPicPr>
-          <p:nvPr/>
-        </p:nvPicPr>
-        <p:blipFill>
-          <a:blip r:embed="rId3">
-            <a:extLst>
-              <a:ext uri="{28A0092B-C50C-407E-A947-70E740481C1C}">
-                <a14:useLocalDpi xmlns:a14="http://schemas.microsoft.com/office/drawing/2010/main" val="0"/>
-              </a:ext>
-            </a:extLst>
-          </a:blip>
-          <a:stretch>
-            <a:fillRect/>
-          </a:stretch>
-        </p:blipFill>
-        <p:spPr>
-          <a:xfrm>
-            <a:off x="62144" y="112237"/>
-            <a:ext cx="588096" cy="1228523"/>
-          </a:xfrm>
-          <a:prstGeom prst="rect">
-            <a:avLst/>
-          </a:prstGeom>
-        </p:spPr>
-      </p:pic>
     </p:spTree>
     <p:extLst>
       <p:ext uri="{BB962C8B-B14F-4D97-AF65-F5344CB8AC3E}">
@@ -5354,7 +5525,7 @@
 </p:sld>
 </file>
 
-<file path=ppt/slides/slide12.xml><?xml version="1.0" encoding="utf-8"?>
+<file path=ppt/slides/slide13.xml><?xml version="1.0" encoding="utf-8"?>
 <p:sld xmlns:a="http://schemas.openxmlformats.org/drawingml/2006/main" xmlns:r="http://schemas.openxmlformats.org/officeDocument/2006/relationships" xmlns:p="http://schemas.openxmlformats.org/presentationml/2006/main">
   <p:cSld>
     <p:spTree>
@@ -5371,56 +5542,6 @@
           <a:chExt cx="0" cy="0"/>
         </a:xfrm>
       </p:grpSpPr>
-      <p:sp>
-        <p:nvSpPr>
-          <p:cNvPr id="2" name="Título 1">
-            <a:extLst>
-              <a:ext uri="{FF2B5EF4-FFF2-40B4-BE49-F238E27FC236}">
-                <a16:creationId xmlns:a16="http://schemas.microsoft.com/office/drawing/2014/main" id="{BC798918-7CB4-450A-A042-F0B538CA25DE}"/>
-              </a:ext>
-            </a:extLst>
-          </p:cNvPr>
-          <p:cNvSpPr>
-            <a:spLocks noGrp="1"/>
-          </p:cNvSpPr>
-          <p:nvPr>
-            <p:ph type="title"/>
-          </p:nvPr>
-        </p:nvSpPr>
-        <p:spPr>
-          <a:xfrm>
-            <a:off x="1032611" y="0"/>
-            <a:ext cx="10827959" cy="1574800"/>
-          </a:xfrm>
-        </p:spPr>
-        <p:txBody>
-          <a:bodyPr>
-            <a:normAutofit/>
-          </a:bodyPr>
-          <a:lstStyle/>
-          <a:p>
-            <a:pPr algn="ctr"/>
-            <a:r>
-              <a:rPr lang="pt-BR" dirty="0">
-                <a:latin typeface="AlternateGothic2 BT" panose="020B0608020202050204" pitchFamily="34" charset="0"/>
-              </a:rPr>
-              <a:t>CEA055 – Estatística e Probabilidade</a:t>
-            </a:r>
-            <a:br>
-              <a:rPr lang="pt-BR" dirty="0">
-                <a:latin typeface="AlternateGothic2 BT" panose="020B0608020202050204" pitchFamily="34" charset="0"/>
-              </a:rPr>
-            </a:br>
-            <a:r>
-              <a:rPr lang="pt-BR" sz="2200" b="1" dirty="0"/>
-              <a:t>Inferência Estatística</a:t>
-            </a:r>
-            <a:endParaRPr lang="pt-BR" dirty="0">
-              <a:latin typeface="AlternateGothic2 BT" panose="020B0608020202050204" pitchFamily="34" charset="0"/>
-            </a:endParaRPr>
-          </a:p>
-        </p:txBody>
-      </p:sp>
       <mc:AlternateContent xmlns:mc="http://schemas.openxmlformats.org/markup-compatibility/2006">
         <mc:Choice xmlns:a14="http://schemas.microsoft.com/office/drawing/2010/main" Requires="a14">
           <p:sp>
@@ -6264,7 +6385,7 @@
         <p:spPr>
           <a:xfrm>
             <a:off x="361395" y="6488668"/>
-            <a:ext cx="2395336" cy="300210"/>
+            <a:ext cx="7620000" cy="300210"/>
           </a:xfrm>
           <a:prstGeom prst="rect">
             <a:avLst/>
@@ -6279,47 +6400,11 @@
           <a:p>
             <a:r>
               <a:rPr lang="pt-BR" sz="1351" dirty="0"/>
-              <a:t>Professor: Marcos Goulart Lima</a:t>
+              <a:t>CEA055 - Estatística e Probabilidade - Professor: Marcos Goulart Lima</a:t>
             </a:r>
           </a:p>
         </p:txBody>
       </p:sp>
-      <p:pic>
-        <p:nvPicPr>
-          <p:cNvPr id="8" name="Espaço Reservado para Conteúdo 4">
-            <a:extLst>
-              <a:ext uri="{FF2B5EF4-FFF2-40B4-BE49-F238E27FC236}">
-                <a16:creationId xmlns:a16="http://schemas.microsoft.com/office/drawing/2014/main" id="{65AB402D-D1A8-4F31-BA42-34A6F0FC69F9}"/>
-              </a:ext>
-            </a:extLst>
-          </p:cNvPr>
-          <p:cNvPicPr>
-            <a:picLocks noChangeAspect="1"/>
-          </p:cNvPicPr>
-          <p:nvPr/>
-        </p:nvPicPr>
-        <p:blipFill>
-          <a:blip r:embed="rId3">
-            <a:extLst>
-              <a:ext uri="{28A0092B-C50C-407E-A947-70E740481C1C}">
-                <a14:useLocalDpi xmlns:a14="http://schemas.microsoft.com/office/drawing/2010/main" val="0"/>
-              </a:ext>
-            </a:extLst>
-          </a:blip>
-          <a:stretch>
-            <a:fillRect/>
-          </a:stretch>
-        </p:blipFill>
-        <p:spPr>
-          <a:xfrm>
-            <a:off x="62144" y="112237"/>
-            <a:ext cx="588096" cy="1228523"/>
-          </a:xfrm>
-          <a:prstGeom prst="rect">
-            <a:avLst/>
-          </a:prstGeom>
-        </p:spPr>
-      </p:pic>
     </p:spTree>
     <p:extLst>
       <p:ext uri="{BB962C8B-B14F-4D97-AF65-F5344CB8AC3E}">
@@ -6333,7 +6418,7 @@
 </p:sld>
 </file>
 
-<file path=ppt/slides/slide13.xml><?xml version="1.0" encoding="utf-8"?>
+<file path=ppt/slides/slide14.xml><?xml version="1.0" encoding="utf-8"?>
 <p:sld xmlns:a="http://schemas.openxmlformats.org/drawingml/2006/main" xmlns:r="http://schemas.openxmlformats.org/officeDocument/2006/relationships" xmlns:p="http://schemas.openxmlformats.org/presentationml/2006/main">
   <p:cSld>
     <p:spTree>
@@ -6352,56 +6437,6 @@
       </p:grpSpPr>
       <p:sp>
         <p:nvSpPr>
-          <p:cNvPr id="2" name="Título 1">
-            <a:extLst>
-              <a:ext uri="{FF2B5EF4-FFF2-40B4-BE49-F238E27FC236}">
-                <a16:creationId xmlns:a16="http://schemas.microsoft.com/office/drawing/2014/main" id="{BC798918-7CB4-450A-A042-F0B538CA25DE}"/>
-              </a:ext>
-            </a:extLst>
-          </p:cNvPr>
-          <p:cNvSpPr>
-            <a:spLocks noGrp="1"/>
-          </p:cNvSpPr>
-          <p:nvPr>
-            <p:ph type="title"/>
-          </p:nvPr>
-        </p:nvSpPr>
-        <p:spPr>
-          <a:xfrm>
-            <a:off x="1032611" y="0"/>
-            <a:ext cx="10827959" cy="1574800"/>
-          </a:xfrm>
-        </p:spPr>
-        <p:txBody>
-          <a:bodyPr>
-            <a:normAutofit/>
-          </a:bodyPr>
-          <a:lstStyle/>
-          <a:p>
-            <a:pPr algn="ctr"/>
-            <a:r>
-              <a:rPr lang="pt-BR" dirty="0">
-                <a:latin typeface="AlternateGothic2 BT" panose="020B0608020202050204" pitchFamily="34" charset="0"/>
-              </a:rPr>
-              <a:t>CEA055 – Estatística e Probabilidade</a:t>
-            </a:r>
-            <a:br>
-              <a:rPr lang="pt-BR" dirty="0">
-                <a:latin typeface="AlternateGothic2 BT" panose="020B0608020202050204" pitchFamily="34" charset="0"/>
-              </a:rPr>
-            </a:br>
-            <a:r>
-              <a:rPr lang="pt-BR" sz="2200" b="1" dirty="0"/>
-              <a:t>Inferência Estatística</a:t>
-            </a:r>
-            <a:endParaRPr lang="pt-BR" dirty="0">
-              <a:latin typeface="AlternateGothic2 BT" panose="020B0608020202050204" pitchFamily="34" charset="0"/>
-            </a:endParaRPr>
-          </a:p>
-        </p:txBody>
-      </p:sp>
-      <p:sp>
-        <p:nvSpPr>
           <p:cNvPr id="6" name="CaixaDeTexto 5">
             <a:extLst>
               <a:ext uri="{FF2B5EF4-FFF2-40B4-BE49-F238E27FC236}">
@@ -6457,7 +6492,7 @@
         <p:spPr>
           <a:xfrm>
             <a:off x="361395" y="6488668"/>
-            <a:ext cx="2395336" cy="300210"/>
+            <a:ext cx="7620000" cy="300210"/>
           </a:xfrm>
           <a:prstGeom prst="rect">
             <a:avLst/>
@@ -6472,47 +6507,11 @@
           <a:p>
             <a:r>
               <a:rPr lang="pt-BR" sz="1351" dirty="0"/>
-              <a:t>Professor: Marcos Goulart Lima</a:t>
+              <a:t>CEA055 - Estatística e Probabilidade - Professor: Marcos Goulart Lima</a:t>
             </a:r>
           </a:p>
         </p:txBody>
       </p:sp>
-      <p:pic>
-        <p:nvPicPr>
-          <p:cNvPr id="8" name="Espaço Reservado para Conteúdo 4">
-            <a:extLst>
-              <a:ext uri="{FF2B5EF4-FFF2-40B4-BE49-F238E27FC236}">
-                <a16:creationId xmlns:a16="http://schemas.microsoft.com/office/drawing/2014/main" id="{65AB402D-D1A8-4F31-BA42-34A6F0FC69F9}"/>
-              </a:ext>
-            </a:extLst>
-          </p:cNvPr>
-          <p:cNvPicPr>
-            <a:picLocks noChangeAspect="1"/>
-          </p:cNvPicPr>
-          <p:nvPr/>
-        </p:nvPicPr>
-        <p:blipFill>
-          <a:blip r:embed="rId2">
-            <a:extLst>
-              <a:ext uri="{28A0092B-C50C-407E-A947-70E740481C1C}">
-                <a14:useLocalDpi xmlns:a14="http://schemas.microsoft.com/office/drawing/2010/main" val="0"/>
-              </a:ext>
-            </a:extLst>
-          </a:blip>
-          <a:stretch>
-            <a:fillRect/>
-          </a:stretch>
-        </p:blipFill>
-        <p:spPr>
-          <a:xfrm>
-            <a:off x="62144" y="112237"/>
-            <a:ext cx="588096" cy="1228523"/>
-          </a:xfrm>
-          <a:prstGeom prst="rect">
-            <a:avLst/>
-          </a:prstGeom>
-        </p:spPr>
-      </p:pic>
       <p:pic>
         <p:nvPicPr>
           <p:cNvPr id="5" name="Imagem 4">
@@ -6556,7 +6555,7 @@
 </p:sld>
 </file>
 
-<file path=ppt/slides/slide14.xml><?xml version="1.0" encoding="utf-8"?>
+<file path=ppt/slides/slide15.xml><?xml version="1.0" encoding="utf-8"?>
 <p:sld xmlns:a="http://schemas.openxmlformats.org/drawingml/2006/main" xmlns:r="http://schemas.openxmlformats.org/officeDocument/2006/relationships" xmlns:p="http://schemas.openxmlformats.org/presentationml/2006/main">
   <p:cSld>
     <p:spTree>
@@ -6573,56 +6572,6 @@
           <a:chExt cx="0" cy="0"/>
         </a:xfrm>
       </p:grpSpPr>
-      <p:sp>
-        <p:nvSpPr>
-          <p:cNvPr id="2" name="Título 1">
-            <a:extLst>
-              <a:ext uri="{FF2B5EF4-FFF2-40B4-BE49-F238E27FC236}">
-                <a16:creationId xmlns:a16="http://schemas.microsoft.com/office/drawing/2014/main" id="{BC798918-7CB4-450A-A042-F0B538CA25DE}"/>
-              </a:ext>
-            </a:extLst>
-          </p:cNvPr>
-          <p:cNvSpPr>
-            <a:spLocks noGrp="1"/>
-          </p:cNvSpPr>
-          <p:nvPr>
-            <p:ph type="title"/>
-          </p:nvPr>
-        </p:nvSpPr>
-        <p:spPr>
-          <a:xfrm>
-            <a:off x="1032611" y="0"/>
-            <a:ext cx="10827959" cy="1574800"/>
-          </a:xfrm>
-        </p:spPr>
-        <p:txBody>
-          <a:bodyPr>
-            <a:normAutofit/>
-          </a:bodyPr>
-          <a:lstStyle/>
-          <a:p>
-            <a:pPr algn="ctr"/>
-            <a:r>
-              <a:rPr lang="pt-BR" dirty="0">
-                <a:latin typeface="AlternateGothic2 BT" panose="020B0608020202050204" pitchFamily="34" charset="0"/>
-              </a:rPr>
-              <a:t>CEA055 – Estatística e Probabilidade</a:t>
-            </a:r>
-            <a:br>
-              <a:rPr lang="pt-BR" dirty="0">
-                <a:latin typeface="AlternateGothic2 BT" panose="020B0608020202050204" pitchFamily="34" charset="0"/>
-              </a:rPr>
-            </a:br>
-            <a:r>
-              <a:rPr lang="pt-BR" sz="2200" b="1" dirty="0"/>
-              <a:t>Inferência Estatística</a:t>
-            </a:r>
-            <a:endParaRPr lang="pt-BR" dirty="0">
-              <a:latin typeface="AlternateGothic2 BT" panose="020B0608020202050204" pitchFamily="34" charset="0"/>
-            </a:endParaRPr>
-          </a:p>
-        </p:txBody>
-      </p:sp>
       <mc:AlternateContent xmlns:mc="http://schemas.openxmlformats.org/markup-compatibility/2006" xmlns:a14="http://schemas.microsoft.com/office/drawing/2010/main">
         <mc:Choice Requires="a14">
           <p:sp>
@@ -6991,7 +6940,7 @@
         <p:spPr>
           <a:xfrm>
             <a:off x="361395" y="6488668"/>
-            <a:ext cx="2395336" cy="300210"/>
+            <a:ext cx="7620000" cy="300210"/>
           </a:xfrm>
           <a:prstGeom prst="rect">
             <a:avLst/>
@@ -7006,47 +6955,11 @@
           <a:p>
             <a:r>
               <a:rPr lang="pt-BR" sz="1351" dirty="0"/>
-              <a:t>Professor: Marcos Goulart Lima</a:t>
+              <a:t>CEA055 - Estatística e Probabilidade - Professor: Marcos Goulart Lima</a:t>
             </a:r>
           </a:p>
         </p:txBody>
       </p:sp>
-      <p:pic>
-        <p:nvPicPr>
-          <p:cNvPr id="8" name="Espaço Reservado para Conteúdo 4">
-            <a:extLst>
-              <a:ext uri="{FF2B5EF4-FFF2-40B4-BE49-F238E27FC236}">
-                <a16:creationId xmlns:a16="http://schemas.microsoft.com/office/drawing/2014/main" id="{65AB402D-D1A8-4F31-BA42-34A6F0FC69F9}"/>
-              </a:ext>
-            </a:extLst>
-          </p:cNvPr>
-          <p:cNvPicPr>
-            <a:picLocks noChangeAspect="1"/>
-          </p:cNvPicPr>
-          <p:nvPr/>
-        </p:nvPicPr>
-        <p:blipFill>
-          <a:blip r:embed="rId3">
-            <a:extLst>
-              <a:ext uri="{28A0092B-C50C-407E-A947-70E740481C1C}">
-                <a14:useLocalDpi xmlns:a14="http://schemas.microsoft.com/office/drawing/2010/main" val="0"/>
-              </a:ext>
-            </a:extLst>
-          </a:blip>
-          <a:stretch>
-            <a:fillRect/>
-          </a:stretch>
-        </p:blipFill>
-        <p:spPr>
-          <a:xfrm>
-            <a:off x="62144" y="112237"/>
-            <a:ext cx="588096" cy="1228523"/>
-          </a:xfrm>
-          <a:prstGeom prst="rect">
-            <a:avLst/>
-          </a:prstGeom>
-        </p:spPr>
-      </p:pic>
     </p:spTree>
     <p:extLst>
       <p:ext uri="{BB962C8B-B14F-4D97-AF65-F5344CB8AC3E}">
@@ -7060,7 +6973,7 @@
 </p:sld>
 </file>
 
-<file path=ppt/slides/slide15.xml><?xml version="1.0" encoding="utf-8"?>
+<file path=ppt/slides/slide16.xml><?xml version="1.0" encoding="utf-8"?>
 <p:sld xmlns:a="http://schemas.openxmlformats.org/drawingml/2006/main" xmlns:r="http://schemas.openxmlformats.org/officeDocument/2006/relationships" xmlns:p="http://schemas.openxmlformats.org/presentationml/2006/main">
   <p:cSld>
     <p:spTree>
@@ -7077,56 +6990,6 @@
           <a:chExt cx="0" cy="0"/>
         </a:xfrm>
       </p:grpSpPr>
-      <p:sp>
-        <p:nvSpPr>
-          <p:cNvPr id="2" name="Título 1">
-            <a:extLst>
-              <a:ext uri="{FF2B5EF4-FFF2-40B4-BE49-F238E27FC236}">
-                <a16:creationId xmlns:a16="http://schemas.microsoft.com/office/drawing/2014/main" id="{BC798918-7CB4-450A-A042-F0B538CA25DE}"/>
-              </a:ext>
-            </a:extLst>
-          </p:cNvPr>
-          <p:cNvSpPr>
-            <a:spLocks noGrp="1"/>
-          </p:cNvSpPr>
-          <p:nvPr>
-            <p:ph type="title"/>
-          </p:nvPr>
-        </p:nvSpPr>
-        <p:spPr>
-          <a:xfrm>
-            <a:off x="1032611" y="0"/>
-            <a:ext cx="10827959" cy="1574800"/>
-          </a:xfrm>
-        </p:spPr>
-        <p:txBody>
-          <a:bodyPr>
-            <a:normAutofit/>
-          </a:bodyPr>
-          <a:lstStyle/>
-          <a:p>
-            <a:pPr algn="ctr"/>
-            <a:r>
-              <a:rPr lang="pt-BR" dirty="0">
-                <a:latin typeface="AlternateGothic2 BT" panose="020B0608020202050204" pitchFamily="34" charset="0"/>
-              </a:rPr>
-              <a:t>CEA055 – Estatística e Probabilidade</a:t>
-            </a:r>
-            <a:br>
-              <a:rPr lang="pt-BR" dirty="0">
-                <a:latin typeface="AlternateGothic2 BT" panose="020B0608020202050204" pitchFamily="34" charset="0"/>
-              </a:rPr>
-            </a:br>
-            <a:r>
-              <a:rPr lang="pt-BR" sz="2200" b="1" dirty="0"/>
-              <a:t>Inferência Estatística</a:t>
-            </a:r>
-            <a:endParaRPr lang="pt-BR" dirty="0">
-              <a:latin typeface="AlternateGothic2 BT" panose="020B0608020202050204" pitchFamily="34" charset="0"/>
-            </a:endParaRPr>
-          </a:p>
-        </p:txBody>
-      </p:sp>
       <mc:AlternateContent xmlns:mc="http://schemas.openxmlformats.org/markup-compatibility/2006" xmlns:a14="http://schemas.microsoft.com/office/drawing/2010/main">
         <mc:Choice Requires="a14">
           <p:sp>
@@ -7367,7 +7230,7 @@
         <p:spPr>
           <a:xfrm>
             <a:off x="361395" y="6488668"/>
-            <a:ext cx="2395336" cy="300210"/>
+            <a:ext cx="7620000" cy="300210"/>
           </a:xfrm>
           <a:prstGeom prst="rect">
             <a:avLst/>
@@ -7382,47 +7245,11 @@
           <a:p>
             <a:r>
               <a:rPr lang="pt-BR" sz="1351" dirty="0"/>
-              <a:t>Professor: Marcos Goulart Lima</a:t>
+              <a:t>CEA055 - Estatística e Probabilidade - Professor: Marcos Goulart Lima</a:t>
             </a:r>
           </a:p>
         </p:txBody>
       </p:sp>
-      <p:pic>
-        <p:nvPicPr>
-          <p:cNvPr id="8" name="Espaço Reservado para Conteúdo 4">
-            <a:extLst>
-              <a:ext uri="{FF2B5EF4-FFF2-40B4-BE49-F238E27FC236}">
-                <a16:creationId xmlns:a16="http://schemas.microsoft.com/office/drawing/2014/main" id="{65AB402D-D1A8-4F31-BA42-34A6F0FC69F9}"/>
-              </a:ext>
-            </a:extLst>
-          </p:cNvPr>
-          <p:cNvPicPr>
-            <a:picLocks noChangeAspect="1"/>
-          </p:cNvPicPr>
-          <p:nvPr/>
-        </p:nvPicPr>
-        <p:blipFill>
-          <a:blip r:embed="rId3">
-            <a:extLst>
-              <a:ext uri="{28A0092B-C50C-407E-A947-70E740481C1C}">
-                <a14:useLocalDpi xmlns:a14="http://schemas.microsoft.com/office/drawing/2010/main" val="0"/>
-              </a:ext>
-            </a:extLst>
-          </a:blip>
-          <a:stretch>
-            <a:fillRect/>
-          </a:stretch>
-        </p:blipFill>
-        <p:spPr>
-          <a:xfrm>
-            <a:off x="62144" y="112237"/>
-            <a:ext cx="588096" cy="1228523"/>
-          </a:xfrm>
-          <a:prstGeom prst="rect">
-            <a:avLst/>
-          </a:prstGeom>
-        </p:spPr>
-      </p:pic>
     </p:spTree>
     <p:extLst>
       <p:ext uri="{BB962C8B-B14F-4D97-AF65-F5344CB8AC3E}">
@@ -7436,7 +7263,7 @@
 </p:sld>
 </file>
 
-<file path=ppt/slides/slide16.xml><?xml version="1.0" encoding="utf-8"?>
+<file path=ppt/slides/slide17.xml><?xml version="1.0" encoding="utf-8"?>
 <p:sld xmlns:a="http://schemas.openxmlformats.org/drawingml/2006/main" xmlns:r="http://schemas.openxmlformats.org/officeDocument/2006/relationships" xmlns:p="http://schemas.openxmlformats.org/presentationml/2006/main">
   <p:cSld>
     <p:spTree>
@@ -7453,56 +7280,6 @@
           <a:chExt cx="0" cy="0"/>
         </a:xfrm>
       </p:grpSpPr>
-      <p:sp>
-        <p:nvSpPr>
-          <p:cNvPr id="2" name="Título 1">
-            <a:extLst>
-              <a:ext uri="{FF2B5EF4-FFF2-40B4-BE49-F238E27FC236}">
-                <a16:creationId xmlns:a16="http://schemas.microsoft.com/office/drawing/2014/main" id="{BC798918-7CB4-450A-A042-F0B538CA25DE}"/>
-              </a:ext>
-            </a:extLst>
-          </p:cNvPr>
-          <p:cNvSpPr>
-            <a:spLocks noGrp="1"/>
-          </p:cNvSpPr>
-          <p:nvPr>
-            <p:ph type="title"/>
-          </p:nvPr>
-        </p:nvSpPr>
-        <p:spPr>
-          <a:xfrm>
-            <a:off x="1032611" y="0"/>
-            <a:ext cx="10827959" cy="1574800"/>
-          </a:xfrm>
-        </p:spPr>
-        <p:txBody>
-          <a:bodyPr>
-            <a:normAutofit/>
-          </a:bodyPr>
-          <a:lstStyle/>
-          <a:p>
-            <a:pPr algn="ctr"/>
-            <a:r>
-              <a:rPr lang="pt-BR" dirty="0">
-                <a:latin typeface="AlternateGothic2 BT" panose="020B0608020202050204" pitchFamily="34" charset="0"/>
-              </a:rPr>
-              <a:t>CEA055 – Estatística e Probabilidade</a:t>
-            </a:r>
-            <a:br>
-              <a:rPr lang="pt-BR" dirty="0">
-                <a:latin typeface="AlternateGothic2 BT" panose="020B0608020202050204" pitchFamily="34" charset="0"/>
-              </a:rPr>
-            </a:br>
-            <a:r>
-              <a:rPr lang="pt-BR" sz="2200" b="1" dirty="0"/>
-              <a:t>Inferência Estatística</a:t>
-            </a:r>
-            <a:endParaRPr lang="pt-BR" dirty="0">
-              <a:latin typeface="AlternateGothic2 BT" panose="020B0608020202050204" pitchFamily="34" charset="0"/>
-            </a:endParaRPr>
-          </a:p>
-        </p:txBody>
-      </p:sp>
       <mc:AlternateContent xmlns:mc="http://schemas.openxmlformats.org/markup-compatibility/2006" xmlns:a14="http://schemas.microsoft.com/office/drawing/2010/main">
         <mc:Choice Requires="a14">
           <p:sp>
@@ -7769,7 +7546,7 @@
         <p:spPr>
           <a:xfrm>
             <a:off x="361395" y="6488668"/>
-            <a:ext cx="2395336" cy="300210"/>
+            <a:ext cx="7620000" cy="300210"/>
           </a:xfrm>
           <a:prstGeom prst="rect">
             <a:avLst/>
@@ -7784,269 +7561,15 @@
           <a:p>
             <a:r>
               <a:rPr lang="pt-BR" sz="1351" dirty="0"/>
-              <a:t>Professor: Marcos Goulart Lima</a:t>
+              <a:t>CEA055 - Estatística e Probabilidade - Professor: Marcos Goulart Lima</a:t>
             </a:r>
           </a:p>
         </p:txBody>
       </p:sp>
-      <p:pic>
-        <p:nvPicPr>
-          <p:cNvPr id="8" name="Espaço Reservado para Conteúdo 4">
-            <a:extLst>
-              <a:ext uri="{FF2B5EF4-FFF2-40B4-BE49-F238E27FC236}">
-                <a16:creationId xmlns:a16="http://schemas.microsoft.com/office/drawing/2014/main" id="{65AB402D-D1A8-4F31-BA42-34A6F0FC69F9}"/>
-              </a:ext>
-            </a:extLst>
-          </p:cNvPr>
-          <p:cNvPicPr>
-            <a:picLocks noChangeAspect="1"/>
-          </p:cNvPicPr>
-          <p:nvPr/>
-        </p:nvPicPr>
-        <p:blipFill>
-          <a:blip r:embed="rId3">
-            <a:extLst>
-              <a:ext uri="{28A0092B-C50C-407E-A947-70E740481C1C}">
-                <a14:useLocalDpi xmlns:a14="http://schemas.microsoft.com/office/drawing/2010/main" val="0"/>
-              </a:ext>
-            </a:extLst>
-          </a:blip>
-          <a:stretch>
-            <a:fillRect/>
-          </a:stretch>
-        </p:blipFill>
-        <p:spPr>
-          <a:xfrm>
-            <a:off x="62144" y="112237"/>
-            <a:ext cx="588096" cy="1228523"/>
-          </a:xfrm>
-          <a:prstGeom prst="rect">
-            <a:avLst/>
-          </a:prstGeom>
-        </p:spPr>
-      </p:pic>
     </p:spTree>
     <p:extLst>
       <p:ext uri="{BB962C8B-B14F-4D97-AF65-F5344CB8AC3E}">
         <p14:creationId xmlns:p14="http://schemas.microsoft.com/office/powerpoint/2010/main" val="860884598"/>
-      </p:ext>
-    </p:extLst>
-  </p:cSld>
-  <p:clrMapOvr>
-    <a:masterClrMapping/>
-  </p:clrMapOvr>
-</p:sld>
-</file>
-
-<file path=ppt/slides/slide17.xml><?xml version="1.0" encoding="utf-8"?>
-<p:sld xmlns:a="http://schemas.openxmlformats.org/drawingml/2006/main" xmlns:r="http://schemas.openxmlformats.org/officeDocument/2006/relationships" xmlns:p="http://schemas.openxmlformats.org/presentationml/2006/main">
-  <p:cSld>
-    <p:spTree>
-      <p:nvGrpSpPr>
-        <p:cNvPr id="1" name=""/>
-        <p:cNvGrpSpPr/>
-        <p:nvPr/>
-      </p:nvGrpSpPr>
-      <p:grpSpPr>
-        <a:xfrm>
-          <a:off x="0" y="0"/>
-          <a:ext cx="0" cy="0"/>
-          <a:chOff x="0" y="0"/>
-          <a:chExt cx="0" cy="0"/>
-        </a:xfrm>
-      </p:grpSpPr>
-      <p:sp>
-        <p:nvSpPr>
-          <p:cNvPr id="2" name="Título 1">
-            <a:extLst>
-              <a:ext uri="{FF2B5EF4-FFF2-40B4-BE49-F238E27FC236}">
-                <a16:creationId xmlns:a16="http://schemas.microsoft.com/office/drawing/2014/main" id="{BC798918-7CB4-450A-A042-F0B538CA25DE}"/>
-              </a:ext>
-            </a:extLst>
-          </p:cNvPr>
-          <p:cNvSpPr>
-            <a:spLocks noGrp="1"/>
-          </p:cNvSpPr>
-          <p:nvPr>
-            <p:ph type="title"/>
-          </p:nvPr>
-        </p:nvSpPr>
-        <p:spPr>
-          <a:xfrm>
-            <a:off x="1032611" y="0"/>
-            <a:ext cx="10827959" cy="1574800"/>
-          </a:xfrm>
-        </p:spPr>
-        <p:txBody>
-          <a:bodyPr>
-            <a:normAutofit/>
-          </a:bodyPr>
-          <a:lstStyle/>
-          <a:p>
-            <a:pPr algn="ctr"/>
-            <a:r>
-              <a:rPr lang="pt-BR" dirty="0">
-                <a:latin typeface="AlternateGothic2 BT" panose="020B0608020202050204" pitchFamily="34" charset="0"/>
-              </a:rPr>
-              <a:t>CEA055 – Estatística e Probabilidade</a:t>
-            </a:r>
-            <a:br>
-              <a:rPr lang="pt-BR" dirty="0">
-                <a:latin typeface="AlternateGothic2 BT" panose="020B0608020202050204" pitchFamily="34" charset="0"/>
-              </a:rPr>
-            </a:br>
-            <a:r>
-              <a:rPr lang="pt-BR" sz="2200" b="1" dirty="0"/>
-              <a:t>Inferência Estatística</a:t>
-            </a:r>
-            <a:endParaRPr lang="pt-BR" dirty="0">
-              <a:latin typeface="AlternateGothic2 BT" panose="020B0608020202050204" pitchFamily="34" charset="0"/>
-            </a:endParaRPr>
-          </a:p>
-        </p:txBody>
-      </p:sp>
-      <p:sp>
-        <p:nvSpPr>
-          <p:cNvPr id="6" name="CaixaDeTexto 5">
-            <a:extLst>
-              <a:ext uri="{FF2B5EF4-FFF2-40B4-BE49-F238E27FC236}">
-                <a16:creationId xmlns:a16="http://schemas.microsoft.com/office/drawing/2014/main" id="{720B10DA-C761-4DEE-8D86-E170E1C2E981}"/>
-              </a:ext>
-            </a:extLst>
-          </p:cNvPr>
-          <p:cNvSpPr txBox="1"/>
-          <p:nvPr/>
-        </p:nvSpPr>
-        <p:spPr>
-          <a:xfrm>
-            <a:off x="881687" y="1506234"/>
-            <a:ext cx="10067277" cy="3970318"/>
-          </a:xfrm>
-          <a:prstGeom prst="rect">
-            <a:avLst/>
-          </a:prstGeom>
-          <a:noFill/>
-        </p:spPr>
-        <p:txBody>
-          <a:bodyPr wrap="square" rtlCol="0">
-            <a:spAutoFit/>
-          </a:bodyPr>
-          <a:lstStyle/>
-          <a:p>
-            <a:r>
-              <a:rPr lang="pt-BR" sz="2800" b="1" dirty="0"/>
-              <a:t>Amostragem por conglomerados</a:t>
-            </a:r>
-          </a:p>
-          <a:p>
-            <a:endParaRPr lang="pt-BR" sz="2800" b="1" dirty="0"/>
-          </a:p>
-          <a:p>
-            <a:r>
-              <a:rPr lang="pt-BR" sz="2800" dirty="0"/>
-              <a:t>A amostra é dividindo a população em conglomerados que satisfazem as seguintes condições:</a:t>
-            </a:r>
-          </a:p>
-          <a:p>
-            <a:endParaRPr lang="pt-BR" sz="2800" dirty="0"/>
-          </a:p>
-          <a:p>
-            <a:pPr marL="457200" indent="-457200">
-              <a:buFont typeface="Arial" panose="020B0604020202020204" pitchFamily="34" charset="0"/>
-              <a:buChar char="•"/>
-            </a:pPr>
-            <a:r>
-              <a:rPr lang="pt-BR" sz="2800" dirty="0"/>
-              <a:t>Dentro de cada conglomerado há uma grande heterogeneidade, ou então uma grande variabilidade;</a:t>
-            </a:r>
-          </a:p>
-          <a:p>
-            <a:pPr marL="457200" indent="-457200">
-              <a:buFont typeface="Arial" panose="020B0604020202020204" pitchFamily="34" charset="0"/>
-              <a:buChar char="•"/>
-            </a:pPr>
-            <a:r>
-              <a:rPr lang="pt-BR" sz="2800" dirty="0"/>
-              <a:t>Entre os conglomerados há uma pequena variabilidade, ou então uma grande homogeneidade.</a:t>
-            </a:r>
-          </a:p>
-        </p:txBody>
-      </p:sp>
-      <p:sp>
-        <p:nvSpPr>
-          <p:cNvPr id="3" name="CaixaDeTexto 2">
-            <a:extLst>
-              <a:ext uri="{FF2B5EF4-FFF2-40B4-BE49-F238E27FC236}">
-                <a16:creationId xmlns:a16="http://schemas.microsoft.com/office/drawing/2014/main" id="{19131A04-B5D6-4211-8B49-4615DE5797E9}"/>
-              </a:ext>
-            </a:extLst>
-          </p:cNvPr>
-          <p:cNvSpPr txBox="1"/>
-          <p:nvPr/>
-        </p:nvSpPr>
-        <p:spPr>
-          <a:xfrm>
-            <a:off x="361395" y="6488668"/>
-            <a:ext cx="2395336" cy="300210"/>
-          </a:xfrm>
-          <a:prstGeom prst="rect">
-            <a:avLst/>
-          </a:prstGeom>
-          <a:noFill/>
-        </p:spPr>
-        <p:txBody>
-          <a:bodyPr wrap="none" rtlCol="0">
-            <a:spAutoFit/>
-          </a:bodyPr>
-          <a:lstStyle/>
-          <a:p>
-            <a:r>
-              <a:rPr lang="pt-BR" sz="1351" dirty="0"/>
-              <a:t>Professor: Marcos Goulart Lima</a:t>
-            </a:r>
-          </a:p>
-        </p:txBody>
-      </p:sp>
-      <p:pic>
-        <p:nvPicPr>
-          <p:cNvPr id="8" name="Espaço Reservado para Conteúdo 4">
-            <a:extLst>
-              <a:ext uri="{FF2B5EF4-FFF2-40B4-BE49-F238E27FC236}">
-                <a16:creationId xmlns:a16="http://schemas.microsoft.com/office/drawing/2014/main" id="{65AB402D-D1A8-4F31-BA42-34A6F0FC69F9}"/>
-              </a:ext>
-            </a:extLst>
-          </p:cNvPr>
-          <p:cNvPicPr>
-            <a:picLocks noChangeAspect="1"/>
-          </p:cNvPicPr>
-          <p:nvPr/>
-        </p:nvPicPr>
-        <p:blipFill>
-          <a:blip r:embed="rId2">
-            <a:extLst>
-              <a:ext uri="{28A0092B-C50C-407E-A947-70E740481C1C}">
-                <a14:useLocalDpi xmlns:a14="http://schemas.microsoft.com/office/drawing/2010/main" val="0"/>
-              </a:ext>
-            </a:extLst>
-          </a:blip>
-          <a:stretch>
-            <a:fillRect/>
-          </a:stretch>
-        </p:blipFill>
-        <p:spPr>
-          <a:xfrm>
-            <a:off x="62144" y="112237"/>
-            <a:ext cx="588096" cy="1228523"/>
-          </a:xfrm>
-          <a:prstGeom prst="rect">
-            <a:avLst/>
-          </a:prstGeom>
-        </p:spPr>
-      </p:pic>
-    </p:spTree>
-    <p:extLst>
-      <p:ext uri="{BB962C8B-B14F-4D97-AF65-F5344CB8AC3E}">
-        <p14:creationId xmlns:p14="http://schemas.microsoft.com/office/powerpoint/2010/main" val="2807241122"/>
       </p:ext>
     </p:extLst>
   </p:cSld>
@@ -8075,54 +7598,136 @@
       </p:grpSpPr>
       <p:sp>
         <p:nvSpPr>
-          <p:cNvPr id="2" name="Título 1">
+          <p:cNvPr id="6" name="CaixaDeTexto 5">
             <a:extLst>
               <a:ext uri="{FF2B5EF4-FFF2-40B4-BE49-F238E27FC236}">
-                <a16:creationId xmlns:a16="http://schemas.microsoft.com/office/drawing/2014/main" id="{BC798918-7CB4-450A-A042-F0B538CA25DE}"/>
+                <a16:creationId xmlns:a16="http://schemas.microsoft.com/office/drawing/2014/main" id="{720B10DA-C761-4DEE-8D86-E170E1C2E981}"/>
               </a:ext>
             </a:extLst>
           </p:cNvPr>
-          <p:cNvSpPr>
-            <a:spLocks noGrp="1"/>
-          </p:cNvSpPr>
-          <p:nvPr>
-            <p:ph type="title"/>
-          </p:nvPr>
+          <p:cNvSpPr txBox="1"/>
+          <p:nvPr/>
         </p:nvSpPr>
         <p:spPr>
           <a:xfrm>
-            <a:off x="1032611" y="0"/>
-            <a:ext cx="10827959" cy="1574800"/>
+            <a:off x="881687" y="1506234"/>
+            <a:ext cx="10067277" cy="3970318"/>
           </a:xfrm>
+          <a:prstGeom prst="rect">
+            <a:avLst/>
+          </a:prstGeom>
+          <a:noFill/>
         </p:spPr>
         <p:txBody>
-          <a:bodyPr>
-            <a:normAutofit/>
+          <a:bodyPr wrap="square" rtlCol="0">
+            <a:spAutoFit/>
           </a:bodyPr>
           <a:lstStyle/>
           <a:p>
-            <a:pPr algn="ctr"/>
-            <a:r>
-              <a:rPr lang="pt-BR" dirty="0">
-                <a:latin typeface="AlternateGothic2 BT" panose="020B0608020202050204" pitchFamily="34" charset="0"/>
-              </a:rPr>
-              <a:t>CEA055 – Estatística e Probabilidade</a:t>
-            </a:r>
-            <a:br>
-              <a:rPr lang="pt-BR" dirty="0">
-                <a:latin typeface="AlternateGothic2 BT" panose="020B0608020202050204" pitchFamily="34" charset="0"/>
-              </a:rPr>
-            </a:br>
-            <a:r>
-              <a:rPr lang="pt-BR" sz="2200" b="1" dirty="0"/>
-              <a:t>Inferência Estatística</a:t>
-            </a:r>
-            <a:endParaRPr lang="pt-BR" dirty="0">
-              <a:latin typeface="AlternateGothic2 BT" panose="020B0608020202050204" pitchFamily="34" charset="0"/>
-            </a:endParaRPr>
+            <a:r>
+              <a:rPr lang="pt-BR" sz="2800" b="1" dirty="0"/>
+              <a:t>Amostragem por conglomerados</a:t>
+            </a:r>
+          </a:p>
+          <a:p>
+            <a:endParaRPr lang="pt-BR" sz="2800" b="1" dirty="0"/>
+          </a:p>
+          <a:p>
+            <a:r>
+              <a:rPr lang="pt-BR" sz="2800" dirty="0"/>
+              <a:t>A amostra é dividindo a população em conglomerados que satisfazem as seguintes condições:</a:t>
+            </a:r>
+          </a:p>
+          <a:p>
+            <a:endParaRPr lang="pt-BR" sz="2800" dirty="0"/>
+          </a:p>
+          <a:p>
+            <a:pPr marL="457200" indent="-457200">
+              <a:buFont typeface="Arial" panose="020B0604020202020204" pitchFamily="34" charset="0"/>
+              <a:buChar char="•"/>
+            </a:pPr>
+            <a:r>
+              <a:rPr lang="pt-BR" sz="2800" dirty="0"/>
+              <a:t>Dentro de cada conglomerado há uma grande heterogeneidade, ou então uma grande variabilidade;</a:t>
+            </a:r>
+          </a:p>
+          <a:p>
+            <a:pPr marL="457200" indent="-457200">
+              <a:buFont typeface="Arial" panose="020B0604020202020204" pitchFamily="34" charset="0"/>
+              <a:buChar char="•"/>
+            </a:pPr>
+            <a:r>
+              <a:rPr lang="pt-BR" sz="2800" dirty="0"/>
+              <a:t>Entre os conglomerados há uma pequena variabilidade, ou então uma grande homogeneidade.</a:t>
+            </a:r>
           </a:p>
         </p:txBody>
       </p:sp>
+      <p:sp>
+        <p:nvSpPr>
+          <p:cNvPr id="3" name="CaixaDeTexto 2">
+            <a:extLst>
+              <a:ext uri="{FF2B5EF4-FFF2-40B4-BE49-F238E27FC236}">
+                <a16:creationId xmlns:a16="http://schemas.microsoft.com/office/drawing/2014/main" id="{19131A04-B5D6-4211-8B49-4615DE5797E9}"/>
+              </a:ext>
+            </a:extLst>
+          </p:cNvPr>
+          <p:cNvSpPr txBox="1"/>
+          <p:nvPr/>
+        </p:nvSpPr>
+        <p:spPr>
+          <a:xfrm>
+            <a:off x="361395" y="6488668"/>
+            <a:ext cx="7620000" cy="300210"/>
+          </a:xfrm>
+          <a:prstGeom prst="rect">
+            <a:avLst/>
+          </a:prstGeom>
+          <a:noFill/>
+        </p:spPr>
+        <p:txBody>
+          <a:bodyPr wrap="none" rtlCol="0">
+            <a:spAutoFit/>
+          </a:bodyPr>
+          <a:lstStyle/>
+          <a:p>
+            <a:r>
+              <a:rPr lang="pt-BR" sz="1351" dirty="0"/>
+              <a:t>CEA055 - Estatística e Probabilidade - Professor: Marcos Goulart Lima</a:t>
+            </a:r>
+          </a:p>
+        </p:txBody>
+      </p:sp>
+    </p:spTree>
+    <p:extLst>
+      <p:ext uri="{BB962C8B-B14F-4D97-AF65-F5344CB8AC3E}">
+        <p14:creationId xmlns:p14="http://schemas.microsoft.com/office/powerpoint/2010/main" val="2807241122"/>
+      </p:ext>
+    </p:extLst>
+  </p:cSld>
+  <p:clrMapOvr>
+    <a:masterClrMapping/>
+  </p:clrMapOvr>
+</p:sld>
+</file>
+
+<file path=ppt/slides/slide19.xml><?xml version="1.0" encoding="utf-8"?>
+<p:sld xmlns:a="http://schemas.openxmlformats.org/drawingml/2006/main" xmlns:r="http://schemas.openxmlformats.org/officeDocument/2006/relationships" xmlns:p="http://schemas.openxmlformats.org/presentationml/2006/main">
+  <p:cSld>
+    <p:spTree>
+      <p:nvGrpSpPr>
+        <p:cNvPr id="1" name=""/>
+        <p:cNvGrpSpPr/>
+        <p:nvPr/>
+      </p:nvGrpSpPr>
+      <p:grpSpPr>
+        <a:xfrm>
+          <a:off x="0" y="0"/>
+          <a:ext cx="0" cy="0"/>
+          <a:chOff x="0" y="0"/>
+          <a:chExt cx="0" cy="0"/>
+        </a:xfrm>
+      </p:grpSpPr>
       <mc:AlternateContent xmlns:mc="http://schemas.openxmlformats.org/markup-compatibility/2006" xmlns:a14="http://schemas.microsoft.com/office/drawing/2010/main">
         <mc:Choice Requires="a14">
           <p:sp>
@@ -8375,7 +7980,7 @@
         <p:spPr>
           <a:xfrm>
             <a:off x="361395" y="6488668"/>
-            <a:ext cx="2395336" cy="300210"/>
+            <a:ext cx="7620000" cy="300210"/>
           </a:xfrm>
           <a:prstGeom prst="rect">
             <a:avLst/>
@@ -8390,47 +7995,11 @@
           <a:p>
             <a:r>
               <a:rPr lang="pt-BR" sz="1351" dirty="0"/>
-              <a:t>Professor: Marcos Goulart Lima</a:t>
+              <a:t>CEA055 - Estatística e Probabilidade - Professor: Marcos Goulart Lima</a:t>
             </a:r>
           </a:p>
         </p:txBody>
       </p:sp>
-      <p:pic>
-        <p:nvPicPr>
-          <p:cNvPr id="8" name="Espaço Reservado para Conteúdo 4">
-            <a:extLst>
-              <a:ext uri="{FF2B5EF4-FFF2-40B4-BE49-F238E27FC236}">
-                <a16:creationId xmlns:a16="http://schemas.microsoft.com/office/drawing/2014/main" id="{65AB402D-D1A8-4F31-BA42-34A6F0FC69F9}"/>
-              </a:ext>
-            </a:extLst>
-          </p:cNvPr>
-          <p:cNvPicPr>
-            <a:picLocks noChangeAspect="1"/>
-          </p:cNvPicPr>
-          <p:nvPr/>
-        </p:nvPicPr>
-        <p:blipFill>
-          <a:blip r:embed="rId3">
-            <a:extLst>
-              <a:ext uri="{28A0092B-C50C-407E-A947-70E740481C1C}">
-                <a14:useLocalDpi xmlns:a14="http://schemas.microsoft.com/office/drawing/2010/main" val="0"/>
-              </a:ext>
-            </a:extLst>
-          </a:blip>
-          <a:stretch>
-            <a:fillRect/>
-          </a:stretch>
-        </p:blipFill>
-        <p:spPr>
-          <a:xfrm>
-            <a:off x="62144" y="112237"/>
-            <a:ext cx="588096" cy="1228523"/>
-          </a:xfrm>
-          <a:prstGeom prst="rect">
-            <a:avLst/>
-          </a:prstGeom>
-        </p:spPr>
-      </p:pic>
     </p:spTree>
     <p:extLst>
       <p:ext uri="{BB962C8B-B14F-4D97-AF65-F5344CB8AC3E}">
@@ -8444,7 +8013,7 @@
 </p:sld>
 </file>
 
-<file path=ppt/slides/slide19.xml><?xml version="1.0" encoding="utf-8"?>
+<file path=ppt/slides/slide2.xml><?xml version="1.0" encoding="utf-8"?>
 <p:sld xmlns:a="http://schemas.openxmlformats.org/drawingml/2006/main" xmlns:r="http://schemas.openxmlformats.org/officeDocument/2006/relationships" xmlns:p="http://schemas.openxmlformats.org/presentationml/2006/main">
   <p:cSld>
     <p:spTree>
@@ -8463,54 +8032,151 @@
       </p:grpSpPr>
       <p:sp>
         <p:nvSpPr>
-          <p:cNvPr id="2" name="Título 1">
+          <p:cNvPr id="6" name="CaixaDeTexto 5">
             <a:extLst>
               <a:ext uri="{FF2B5EF4-FFF2-40B4-BE49-F238E27FC236}">
-                <a16:creationId xmlns:a16="http://schemas.microsoft.com/office/drawing/2014/main" id="{BC798918-7CB4-450A-A042-F0B538CA25DE}"/>
+                <a16:creationId xmlns:a16="http://schemas.microsoft.com/office/drawing/2014/main" id="{720B10DA-C761-4DEE-8D86-E170E1C2E981}"/>
               </a:ext>
             </a:extLst>
           </p:cNvPr>
-          <p:cNvSpPr>
-            <a:spLocks noGrp="1"/>
-          </p:cNvSpPr>
-          <p:nvPr>
-            <p:ph type="title"/>
-          </p:nvPr>
+          <p:cNvSpPr txBox="1"/>
+          <p:nvPr/>
         </p:nvSpPr>
         <p:spPr>
           <a:xfrm>
-            <a:off x="1032611" y="2"/>
-            <a:ext cx="10827959" cy="1641228"/>
+            <a:off x="650241" y="1506234"/>
+            <a:ext cx="10908714" cy="3970318"/>
           </a:xfrm>
+          <a:prstGeom prst="rect">
+            <a:avLst/>
+          </a:prstGeom>
+          <a:noFill/>
         </p:spPr>
         <p:txBody>
-          <a:bodyPr>
-            <a:normAutofit/>
+          <a:bodyPr wrap="square" rtlCol="0">
+            <a:spAutoFit/>
           </a:bodyPr>
           <a:lstStyle/>
           <a:p>
-            <a:pPr algn="ctr"/>
-            <a:r>
-              <a:rPr lang="pt-BR" dirty="0">
-                <a:latin typeface="AlternateGothic2 BT" panose="020B0608020202050204" pitchFamily="34" charset="0"/>
-              </a:rPr>
-              <a:t>CEA055 – Estatística e Probabilidade</a:t>
-            </a:r>
-            <a:br>
-              <a:rPr lang="pt-BR" dirty="0">
-                <a:latin typeface="AlternateGothic2 BT" panose="020B0608020202050204" pitchFamily="34" charset="0"/>
-              </a:rPr>
-            </a:br>
-            <a:r>
-              <a:rPr lang="pt-BR" sz="2200" b="1" dirty="0"/>
-              <a:t>Inferência Estatística</a:t>
-            </a:r>
-            <a:endParaRPr lang="pt-BR" dirty="0">
-              <a:latin typeface="AlternateGothic2 BT" panose="020B0608020202050204" pitchFamily="34" charset="0"/>
-            </a:endParaRPr>
+            <a:r>
+              <a:rPr lang="pt-BR" sz="2800" b="1" dirty="0"/>
+              <a:t>Introdução</a:t>
+            </a:r>
+          </a:p>
+          <a:p>
+            <a:pPr marL="285737" indent="-285737">
+              <a:buFont typeface="Arial" panose="020B0604020202020204" pitchFamily="34" charset="0"/>
+              <a:buChar char="•"/>
+            </a:pPr>
+            <a:endParaRPr lang="pt-BR" sz="2800" dirty="0"/>
+          </a:p>
+          <a:p>
+            <a:pPr marL="285737" indent="-285737">
+              <a:buFont typeface="Arial" panose="020B0604020202020204" pitchFamily="34" charset="0"/>
+              <a:buChar char="•"/>
+            </a:pPr>
+            <a:r>
+              <a:rPr lang="pt-BR" sz="2800" dirty="0"/>
+              <a:t>Na Parte 1 - Resumo dos dados.</a:t>
+            </a:r>
+          </a:p>
+          <a:p>
+            <a:pPr marL="285737" indent="-285737">
+              <a:buFont typeface="Arial" panose="020B0604020202020204" pitchFamily="34" charset="0"/>
+              <a:buChar char="•"/>
+            </a:pPr>
+            <a:r>
+              <a:rPr lang="pt-BR" sz="2800" dirty="0"/>
+              <a:t>Na Parte 2 - Modelos teóricos (probabilísticos).</a:t>
+            </a:r>
+          </a:p>
+          <a:p>
+            <a:pPr marL="285737" indent="-285737">
+              <a:buFont typeface="Arial" panose="020B0604020202020204" pitchFamily="34" charset="0"/>
+              <a:buChar char="•"/>
+            </a:pPr>
+            <a:endParaRPr lang="pt-BR" sz="2800" dirty="0"/>
+          </a:p>
+          <a:p>
+            <a:pPr marL="285737" indent="-285737">
+              <a:buFont typeface="Arial" panose="020B0604020202020204" pitchFamily="34" charset="0"/>
+              <a:buChar char="•"/>
+            </a:pPr>
+            <a:endParaRPr lang="pt-BR" sz="2800" dirty="0"/>
+          </a:p>
+          <a:p>
+            <a:r>
+              <a:rPr lang="pt-BR" sz="2800" dirty="0"/>
+              <a:t>Nesta terceira parte apresentaremos os argumentos estatísticos para fazer afirmações sobre as características de uma população, com base em informações dadas por amostras.</a:t>
+            </a:r>
           </a:p>
         </p:txBody>
       </p:sp>
+      <p:sp>
+        <p:nvSpPr>
+          <p:cNvPr id="3" name="CaixaDeTexto 2">
+            <a:extLst>
+              <a:ext uri="{FF2B5EF4-FFF2-40B4-BE49-F238E27FC236}">
+                <a16:creationId xmlns:a16="http://schemas.microsoft.com/office/drawing/2014/main" id="{19131A04-B5D6-4211-8B49-4615DE5797E9}"/>
+              </a:ext>
+            </a:extLst>
+          </p:cNvPr>
+          <p:cNvSpPr txBox="1"/>
+          <p:nvPr/>
+        </p:nvSpPr>
+        <p:spPr>
+          <a:xfrm>
+            <a:off x="361395" y="6488668"/>
+            <a:ext cx="7620000" cy="300210"/>
+          </a:xfrm>
+          <a:prstGeom prst="rect">
+            <a:avLst/>
+          </a:prstGeom>
+          <a:noFill/>
+        </p:spPr>
+        <p:txBody>
+          <a:bodyPr wrap="none" rtlCol="0">
+            <a:spAutoFit/>
+          </a:bodyPr>
+          <a:lstStyle/>
+          <a:p>
+            <a:r>
+              <a:rPr lang="pt-BR" sz="1351" dirty="0"/>
+              <a:t>CEA055 - Estatística e Probabilidade - Professor: Marcos Goulart Lima</a:t>
+            </a:r>
+          </a:p>
+        </p:txBody>
+      </p:sp>
+    </p:spTree>
+    <p:extLst>
+      <p:ext uri="{BB962C8B-B14F-4D97-AF65-F5344CB8AC3E}">
+        <p14:creationId xmlns:p14="http://schemas.microsoft.com/office/powerpoint/2010/main" val="174771625"/>
+      </p:ext>
+    </p:extLst>
+  </p:cSld>
+  <p:clrMapOvr>
+    <a:masterClrMapping/>
+  </p:clrMapOvr>
+</p:sld>
+</file>
+
+<file path=ppt/slides/slide20.xml><?xml version="1.0" encoding="utf-8"?>
+<p:sld xmlns:a="http://schemas.openxmlformats.org/drawingml/2006/main" xmlns:r="http://schemas.openxmlformats.org/officeDocument/2006/relationships" xmlns:p="http://schemas.openxmlformats.org/presentationml/2006/main">
+  <p:cSld>
+    <p:spTree>
+      <p:nvGrpSpPr>
+        <p:cNvPr id="1" name=""/>
+        <p:cNvGrpSpPr/>
+        <p:nvPr/>
+      </p:nvGrpSpPr>
+      <p:grpSpPr>
+        <a:xfrm>
+          <a:off x="0" y="0"/>
+          <a:ext cx="0" cy="0"/>
+          <a:chOff x="0" y="0"/>
+          <a:chExt cx="0" cy="0"/>
+        </a:xfrm>
+      </p:grpSpPr>
       <p:pic>
         <p:nvPicPr>
           <p:cNvPr id="5" name="Espaço Reservado para Conteúdo 4">
@@ -8604,7 +8270,7 @@
         <p:spPr>
           <a:xfrm>
             <a:off x="361395" y="6488668"/>
-            <a:ext cx="2348848" cy="300210"/>
+            <a:ext cx="7620000" cy="300210"/>
           </a:xfrm>
           <a:prstGeom prst="rect">
             <a:avLst/>
@@ -8623,7 +8289,7 @@
                   <a:schemeClr val="bg1"/>
                 </a:solidFill>
               </a:rPr>
-              <a:t>Professor Marcos Goulart Lima</a:t>
+              <a:t>CEA055 - Estatística e Probabilidade - Professor: Marcos Goulart Lima</a:t>
             </a:r>
           </a:p>
         </p:txBody>
@@ -8641,7 +8307,7 @@
 </p:sld>
 </file>
 
-<file path=ppt/slides/slide2.xml><?xml version="1.0" encoding="utf-8"?>
+<file path=ppt/slides/slide21.xml><?xml version="1.0" encoding="utf-8"?>
 <p:sld xmlns:a="http://schemas.openxmlformats.org/drawingml/2006/main" xmlns:r="http://schemas.openxmlformats.org/officeDocument/2006/relationships" xmlns:p="http://schemas.openxmlformats.org/presentationml/2006/main">
   <p:cSld>
     <p:spTree>
@@ -8660,56 +8326,6 @@
       </p:grpSpPr>
       <p:sp>
         <p:nvSpPr>
-          <p:cNvPr id="2" name="Título 1">
-            <a:extLst>
-              <a:ext uri="{FF2B5EF4-FFF2-40B4-BE49-F238E27FC236}">
-                <a16:creationId xmlns:a16="http://schemas.microsoft.com/office/drawing/2014/main" id="{BC798918-7CB4-450A-A042-F0B538CA25DE}"/>
-              </a:ext>
-            </a:extLst>
-          </p:cNvPr>
-          <p:cNvSpPr>
-            <a:spLocks noGrp="1"/>
-          </p:cNvSpPr>
-          <p:nvPr>
-            <p:ph type="title"/>
-          </p:nvPr>
-        </p:nvSpPr>
-        <p:spPr>
-          <a:xfrm>
-            <a:off x="1032611" y="0"/>
-            <a:ext cx="10827959" cy="1574800"/>
-          </a:xfrm>
-        </p:spPr>
-        <p:txBody>
-          <a:bodyPr>
-            <a:normAutofit/>
-          </a:bodyPr>
-          <a:lstStyle/>
-          <a:p>
-            <a:pPr algn="ctr"/>
-            <a:r>
-              <a:rPr lang="pt-BR" dirty="0">
-                <a:latin typeface="AlternateGothic2 BT" panose="020B0608020202050204" pitchFamily="34" charset="0"/>
-              </a:rPr>
-              <a:t>CEA055 – Estatística e Probabilidade</a:t>
-            </a:r>
-            <a:br>
-              <a:rPr lang="pt-BR" dirty="0">
-                <a:latin typeface="AlternateGothic2 BT" panose="020B0608020202050204" pitchFamily="34" charset="0"/>
-              </a:rPr>
-            </a:br>
-            <a:r>
-              <a:rPr lang="pt-BR" sz="2200" b="1" dirty="0"/>
-              <a:t>Inferência Estatística</a:t>
-            </a:r>
-            <a:endParaRPr lang="pt-BR" dirty="0">
-              <a:latin typeface="AlternateGothic2 BT" panose="020B0608020202050204" pitchFamily="34" charset="0"/>
-            </a:endParaRPr>
-          </a:p>
-        </p:txBody>
-      </p:sp>
-      <p:sp>
-        <p:nvSpPr>
           <p:cNvPr id="6" name="CaixaDeTexto 5">
             <a:extLst>
               <a:ext uri="{FF2B5EF4-FFF2-40B4-BE49-F238E27FC236}">
@@ -8722,8 +8338,8 @@
         </p:nvSpPr>
         <p:spPr>
           <a:xfrm>
-            <a:off x="650241" y="1506234"/>
-            <a:ext cx="10908714" cy="4832092"/>
+            <a:off x="881687" y="1441868"/>
+            <a:ext cx="10067277" cy="4295185"/>
           </a:xfrm>
           <a:prstGeom prst="rect">
             <a:avLst/>
@@ -8737,51 +8353,70 @@
           <a:lstStyle/>
           <a:p>
             <a:r>
-              <a:rPr lang="pt-BR" sz="2800" b="1" dirty="0"/>
-              <a:t>Conceitos básicos</a:t>
-            </a:r>
-          </a:p>
-          <a:p>
-            <a:pPr marL="285737" indent="-285737">
+              <a:rPr lang="pt-BR" sz="2400" b="1" dirty="0"/>
+              <a:t>Atividades referentes à aula</a:t>
+            </a:r>
+          </a:p>
+          <a:p>
+            <a:r>
+              <a:rPr lang="pt-BR" sz="2000" dirty="0"/>
+              <a:t xml:space="preserve">Leitura recomendada: </a:t>
+            </a:r>
+          </a:p>
+          <a:p>
+            <a:pPr marL="457178" indent="-457178">
               <a:buFont typeface="Arial" panose="020B0604020202020204" pitchFamily="34" charset="0"/>
               <a:buChar char="•"/>
             </a:pPr>
-            <a:endParaRPr lang="pt-BR" sz="2800" dirty="0"/>
-          </a:p>
-          <a:p>
-            <a:r>
-              <a:rPr lang="pt-BR" sz="2800" b="1" dirty="0"/>
-              <a:t>População</a:t>
-            </a:r>
-            <a:r>
-              <a:rPr lang="pt-BR" sz="2800" dirty="0"/>
-              <a:t xml:space="preserve"> é o conjunto formado por indivíduos ou objetos que têm pelo menos uma variável comum e observável.</a:t>
-            </a:r>
-          </a:p>
-          <a:p>
-            <a:endParaRPr lang="pt-BR" sz="2800" dirty="0"/>
-          </a:p>
-          <a:p>
-            <a:r>
-              <a:rPr lang="pt-BR" sz="2800" b="1" dirty="0"/>
-              <a:t xml:space="preserve">Amostra: </a:t>
-            </a:r>
-            <a:r>
-              <a:rPr lang="pt-BR" sz="2800" dirty="0"/>
-              <a:t>fixada uma população, qualquer subconjunto formado exclusivamente por seus elementos é denominado amostra desta população.</a:t>
-            </a:r>
-          </a:p>
-          <a:p>
-            <a:endParaRPr lang="pt-BR" sz="2800" dirty="0"/>
-          </a:p>
-          <a:p>
-            <a:r>
-              <a:rPr lang="pt-BR" sz="2800" b="1" dirty="0"/>
-              <a:t xml:space="preserve">Amostragem: </a:t>
-            </a:r>
-            <a:r>
-              <a:rPr lang="pt-BR" sz="2800" dirty="0"/>
-              <a:t>é o processo de seleção de uma amostra, que possibilita o estudo das características da população.</a:t>
+            <a:r>
+              <a:rPr lang="pt-BR" sz="2000" dirty="0"/>
+              <a:t>Bussab &amp; Morettin — Cap. 10: 10.2, 10.4, 10.5, 10.6</a:t>
+            </a:r>
+          </a:p>
+          <a:p>
+            <a:pPr marL="457178" indent="-457178">
+              <a:buFont typeface="Arial" panose="020B0604020202020204" pitchFamily="34" charset="0"/>
+              <a:buChar char="•"/>
+            </a:pPr>
+            <a:r>
+              <a:rPr lang="pt-BR" sz="2000" dirty="0"/>
+              <a:t>Montgomery &amp; Runger — Cap. 7: 7.1</a:t>
+            </a:r>
+          </a:p>
+          <a:p>
+            <a:pPr marL="457178" indent="-457178">
+              <a:buFont typeface="Arial" panose="020B0604020202020204" pitchFamily="34" charset="0"/>
+              <a:buChar char="•"/>
+            </a:pPr>
+            <a:r>
+              <a:rPr lang="pt-BR" sz="2000" dirty="0"/>
+              <a:t>Magalhães &amp; Lima — Cap. 7: 7.1, 7.2</a:t>
+            </a:r>
+          </a:p>
+          <a:p>
+            <a:pPr marL="457178" indent="-457178">
+              <a:buFont typeface="Arial" panose="020B0604020202020204" pitchFamily="34" charset="0"/>
+              <a:buChar char="•"/>
+            </a:pPr>
+            <a:r>
+              <a:rPr lang="pt-BR" sz="2000" dirty="0"/>
+              <a:t>Morettin — Cap. 7: 7.1, 7.2; Cap. 8: 8.1</a:t>
+            </a:r>
+          </a:p>
+          <a:p>
+            <a:r>
+              <a:rPr lang="pt-BR" sz="2000" dirty="0"/>
+              <a:t>Exercícios recomendados:</a:t>
+            </a:r>
+          </a:p>
+          <a:p>
+            <a:pPr marL="457178" indent="-457178">
+              <a:buFont typeface="Arial" panose="020B0604020202020204" pitchFamily="34" charset="0"/>
+              <a:buChar char="•"/>
+            </a:pPr>
+            <a:r>
+              <a:rPr lang="pt-BR" sz="2000" dirty="0"/>
+              <a:t>Bussab, Cap. 10: exercícios sobre população, amostra e tipos de amostragem</a:t>
             </a:r>
           </a:p>
         </p:txBody>
@@ -8801,7 +8436,7 @@
         <p:spPr>
           <a:xfrm>
             <a:off x="361395" y="6488668"/>
-            <a:ext cx="2395336" cy="300210"/>
+            <a:ext cx="7620000" cy="300210"/>
           </a:xfrm>
           <a:prstGeom prst="rect">
             <a:avLst/>
@@ -8816,51 +8451,15 @@
           <a:p>
             <a:r>
               <a:rPr lang="pt-BR" sz="1351" dirty="0"/>
-              <a:t>Professor: Marcos Goulart Lima</a:t>
+              <a:t>CEA055 - Estatística e Probabilidade - Professor: Marcos Goulart Lima</a:t>
             </a:r>
           </a:p>
         </p:txBody>
       </p:sp>
-      <p:pic>
-        <p:nvPicPr>
-          <p:cNvPr id="8" name="Espaço Reservado para Conteúdo 4">
-            <a:extLst>
-              <a:ext uri="{FF2B5EF4-FFF2-40B4-BE49-F238E27FC236}">
-                <a16:creationId xmlns:a16="http://schemas.microsoft.com/office/drawing/2014/main" id="{65AB402D-D1A8-4F31-BA42-34A6F0FC69F9}"/>
-              </a:ext>
-            </a:extLst>
-          </p:cNvPr>
-          <p:cNvPicPr>
-            <a:picLocks noChangeAspect="1"/>
-          </p:cNvPicPr>
-          <p:nvPr/>
-        </p:nvPicPr>
-        <p:blipFill>
-          <a:blip r:embed="rId2">
-            <a:extLst>
-              <a:ext uri="{28A0092B-C50C-407E-A947-70E740481C1C}">
-                <a14:useLocalDpi xmlns:a14="http://schemas.microsoft.com/office/drawing/2010/main" val="0"/>
-              </a:ext>
-            </a:extLst>
-          </a:blip>
-          <a:stretch>
-            <a:fillRect/>
-          </a:stretch>
-        </p:blipFill>
-        <p:spPr>
-          <a:xfrm>
-            <a:off x="62144" y="112237"/>
-            <a:ext cx="588096" cy="1228523"/>
-          </a:xfrm>
-          <a:prstGeom prst="rect">
-            <a:avLst/>
-          </a:prstGeom>
-        </p:spPr>
-      </p:pic>
     </p:spTree>
     <p:extLst>
       <p:ext uri="{BB962C8B-B14F-4D97-AF65-F5344CB8AC3E}">
-        <p14:creationId xmlns:p14="http://schemas.microsoft.com/office/powerpoint/2010/main" val="816178701"/>
+        <p14:creationId xmlns:p14="http://schemas.microsoft.com/office/powerpoint/2010/main" val="1670738953"/>
       </p:ext>
     </p:extLst>
   </p:cSld>
@@ -8889,54 +8488,147 @@
       </p:grpSpPr>
       <p:sp>
         <p:nvSpPr>
-          <p:cNvPr id="2" name="Título 1">
+          <p:cNvPr id="6" name="CaixaDeTexto 5">
             <a:extLst>
               <a:ext uri="{FF2B5EF4-FFF2-40B4-BE49-F238E27FC236}">
-                <a16:creationId xmlns:a16="http://schemas.microsoft.com/office/drawing/2014/main" id="{BC798918-7CB4-450A-A042-F0B538CA25DE}"/>
+                <a16:creationId xmlns:a16="http://schemas.microsoft.com/office/drawing/2014/main" id="{720B10DA-C761-4DEE-8D86-E170E1C2E981}"/>
               </a:ext>
             </a:extLst>
           </p:cNvPr>
-          <p:cNvSpPr>
-            <a:spLocks noGrp="1"/>
-          </p:cNvSpPr>
-          <p:nvPr>
-            <p:ph type="title"/>
-          </p:nvPr>
+          <p:cNvSpPr txBox="1"/>
+          <p:nvPr/>
         </p:nvSpPr>
         <p:spPr>
           <a:xfrm>
-            <a:off x="1032611" y="0"/>
-            <a:ext cx="10827959" cy="1574800"/>
+            <a:off x="650241" y="1506234"/>
+            <a:ext cx="10908714" cy="4832092"/>
           </a:xfrm>
+          <a:prstGeom prst="rect">
+            <a:avLst/>
+          </a:prstGeom>
+          <a:noFill/>
         </p:spPr>
         <p:txBody>
-          <a:bodyPr>
-            <a:normAutofit/>
+          <a:bodyPr wrap="square" rtlCol="0">
+            <a:spAutoFit/>
           </a:bodyPr>
           <a:lstStyle/>
           <a:p>
-            <a:pPr algn="ctr"/>
-            <a:r>
-              <a:rPr lang="pt-BR" dirty="0">
-                <a:latin typeface="AlternateGothic2 BT" panose="020B0608020202050204" pitchFamily="34" charset="0"/>
-              </a:rPr>
-              <a:t>CEA055 – Estatística e Probabilidade</a:t>
-            </a:r>
-            <a:br>
-              <a:rPr lang="pt-BR" dirty="0">
-                <a:latin typeface="AlternateGothic2 BT" panose="020B0608020202050204" pitchFamily="34" charset="0"/>
-              </a:rPr>
-            </a:br>
-            <a:r>
-              <a:rPr lang="pt-BR" sz="2200" b="1" dirty="0"/>
-              <a:t>Inferência Estatística</a:t>
-            </a:r>
-            <a:endParaRPr lang="pt-BR" dirty="0">
-              <a:latin typeface="AlternateGothic2 BT" panose="020B0608020202050204" pitchFamily="34" charset="0"/>
-            </a:endParaRPr>
+            <a:r>
+              <a:rPr lang="pt-BR" sz="2800" b="1" dirty="0"/>
+              <a:t>Conceitos básicos</a:t>
+            </a:r>
+          </a:p>
+          <a:p>
+            <a:pPr marL="285737" indent="-285737">
+              <a:buFont typeface="Arial" panose="020B0604020202020204" pitchFamily="34" charset="0"/>
+              <a:buChar char="•"/>
+            </a:pPr>
+            <a:endParaRPr lang="pt-BR" sz="2800" dirty="0"/>
+          </a:p>
+          <a:p>
+            <a:r>
+              <a:rPr lang="pt-BR" sz="2800" b="1" dirty="0"/>
+              <a:t>População</a:t>
+            </a:r>
+            <a:r>
+              <a:rPr lang="pt-BR" sz="2800" dirty="0"/>
+              <a:t xml:space="preserve"> é o conjunto formado por indivíduos ou objetos que têm pelo menos uma variável comum e observável.</a:t>
+            </a:r>
+          </a:p>
+          <a:p>
+            <a:endParaRPr lang="pt-BR" sz="2800" dirty="0"/>
+          </a:p>
+          <a:p>
+            <a:r>
+              <a:rPr lang="pt-BR" sz="2800" b="1" dirty="0"/>
+              <a:t xml:space="preserve">Amostra: </a:t>
+            </a:r>
+            <a:r>
+              <a:rPr lang="pt-BR" sz="2800" dirty="0"/>
+              <a:t>fixada uma população, qualquer subconjunto formado exclusivamente por seus elementos é denominado amostra desta população.</a:t>
+            </a:r>
+          </a:p>
+          <a:p>
+            <a:endParaRPr lang="pt-BR" sz="2800" dirty="0"/>
+          </a:p>
+          <a:p>
+            <a:r>
+              <a:rPr lang="pt-BR" sz="2800" b="1" dirty="0"/>
+              <a:t xml:space="preserve">Amostragem: </a:t>
+            </a:r>
+            <a:r>
+              <a:rPr lang="pt-BR" sz="2800" dirty="0"/>
+              <a:t>é o processo de seleção de uma amostra, que possibilita o estudo das características da população.</a:t>
+            </a:r>
           </a:p>
         </p:txBody>
       </p:sp>
+      <p:sp>
+        <p:nvSpPr>
+          <p:cNvPr id="3" name="CaixaDeTexto 2">
+            <a:extLst>
+              <a:ext uri="{FF2B5EF4-FFF2-40B4-BE49-F238E27FC236}">
+                <a16:creationId xmlns:a16="http://schemas.microsoft.com/office/drawing/2014/main" id="{19131A04-B5D6-4211-8B49-4615DE5797E9}"/>
+              </a:ext>
+            </a:extLst>
+          </p:cNvPr>
+          <p:cNvSpPr txBox="1"/>
+          <p:nvPr/>
+        </p:nvSpPr>
+        <p:spPr>
+          <a:xfrm>
+            <a:off x="361395" y="6488668"/>
+            <a:ext cx="7620000" cy="300210"/>
+          </a:xfrm>
+          <a:prstGeom prst="rect">
+            <a:avLst/>
+          </a:prstGeom>
+          <a:noFill/>
+        </p:spPr>
+        <p:txBody>
+          <a:bodyPr wrap="none" rtlCol="0">
+            <a:spAutoFit/>
+          </a:bodyPr>
+          <a:lstStyle/>
+          <a:p>
+            <a:r>
+              <a:rPr lang="pt-BR" sz="1351" dirty="0"/>
+              <a:t>CEA055 - Estatística e Probabilidade - Professor: Marcos Goulart Lima</a:t>
+            </a:r>
+          </a:p>
+        </p:txBody>
+      </p:sp>
+    </p:spTree>
+    <p:extLst>
+      <p:ext uri="{BB962C8B-B14F-4D97-AF65-F5344CB8AC3E}">
+        <p14:creationId xmlns:p14="http://schemas.microsoft.com/office/powerpoint/2010/main" val="816178701"/>
+      </p:ext>
+    </p:extLst>
+  </p:cSld>
+  <p:clrMapOvr>
+    <a:masterClrMapping/>
+  </p:clrMapOvr>
+</p:sld>
+</file>
+
+<file path=ppt/slides/slide4.xml><?xml version="1.0" encoding="utf-8"?>
+<p:sld xmlns:a="http://schemas.openxmlformats.org/drawingml/2006/main" xmlns:r="http://schemas.openxmlformats.org/officeDocument/2006/relationships" xmlns:p="http://schemas.openxmlformats.org/presentationml/2006/main">
+  <p:cSld>
+    <p:spTree>
+      <p:nvGrpSpPr>
+        <p:cNvPr id="1" name=""/>
+        <p:cNvGrpSpPr/>
+        <p:nvPr/>
+      </p:nvGrpSpPr>
+      <p:grpSpPr>
+        <a:xfrm>
+          <a:off x="0" y="0"/>
+          <a:ext cx="0" cy="0"/>
+          <a:chOff x="0" y="0"/>
+          <a:chExt cx="0" cy="0"/>
+        </a:xfrm>
+      </p:grpSpPr>
       <mc:AlternateContent xmlns:mc="http://schemas.openxmlformats.org/markup-compatibility/2006" xmlns:a14="http://schemas.microsoft.com/office/drawing/2010/main">
         <mc:Choice Requires="a14">
           <p:sp>
@@ -9185,7 +8877,7 @@
         <p:spPr>
           <a:xfrm>
             <a:off x="361395" y="6488668"/>
-            <a:ext cx="2395336" cy="300210"/>
+            <a:ext cx="7620000" cy="300210"/>
           </a:xfrm>
           <a:prstGeom prst="rect">
             <a:avLst/>
@@ -9200,47 +8892,11 @@
           <a:p>
             <a:r>
               <a:rPr lang="pt-BR" sz="1351" dirty="0"/>
-              <a:t>Professor: Marcos Goulart Lima</a:t>
+              <a:t>CEA055 - Estatística e Probabilidade - Professor: Marcos Goulart Lima</a:t>
             </a:r>
           </a:p>
         </p:txBody>
       </p:sp>
-      <p:pic>
-        <p:nvPicPr>
-          <p:cNvPr id="8" name="Espaço Reservado para Conteúdo 4">
-            <a:extLst>
-              <a:ext uri="{FF2B5EF4-FFF2-40B4-BE49-F238E27FC236}">
-                <a16:creationId xmlns:a16="http://schemas.microsoft.com/office/drawing/2014/main" id="{65AB402D-D1A8-4F31-BA42-34A6F0FC69F9}"/>
-              </a:ext>
-            </a:extLst>
-          </p:cNvPr>
-          <p:cNvPicPr>
-            <a:picLocks noChangeAspect="1"/>
-          </p:cNvPicPr>
-          <p:nvPr/>
-        </p:nvPicPr>
-        <p:blipFill>
-          <a:blip r:embed="rId3">
-            <a:extLst>
-              <a:ext uri="{28A0092B-C50C-407E-A947-70E740481C1C}">
-                <a14:useLocalDpi xmlns:a14="http://schemas.microsoft.com/office/drawing/2010/main" val="0"/>
-              </a:ext>
-            </a:extLst>
-          </a:blip>
-          <a:stretch>
-            <a:fillRect/>
-          </a:stretch>
-        </p:blipFill>
-        <p:spPr>
-          <a:xfrm>
-            <a:off x="62144" y="112237"/>
-            <a:ext cx="588096" cy="1228523"/>
-          </a:xfrm>
-          <a:prstGeom prst="rect">
-            <a:avLst/>
-          </a:prstGeom>
-        </p:spPr>
-      </p:pic>
     </p:spTree>
     <p:extLst>
       <p:ext uri="{BB962C8B-B14F-4D97-AF65-F5344CB8AC3E}">
@@ -9254,7 +8910,7 @@
 </p:sld>
 </file>
 
-<file path=ppt/slides/slide4.xml><?xml version="1.0" encoding="utf-8"?>
+<file path=ppt/slides/slide5.xml><?xml version="1.0" encoding="utf-8"?>
 <p:sld xmlns:a="http://schemas.openxmlformats.org/drawingml/2006/main" xmlns:r="http://schemas.openxmlformats.org/officeDocument/2006/relationships" xmlns:p="http://schemas.openxmlformats.org/presentationml/2006/main">
   <p:cSld>
     <p:spTree>
@@ -9271,56 +8927,6 @@
           <a:chExt cx="0" cy="0"/>
         </a:xfrm>
       </p:grpSpPr>
-      <p:sp>
-        <p:nvSpPr>
-          <p:cNvPr id="2" name="Título 1">
-            <a:extLst>
-              <a:ext uri="{FF2B5EF4-FFF2-40B4-BE49-F238E27FC236}">
-                <a16:creationId xmlns:a16="http://schemas.microsoft.com/office/drawing/2014/main" id="{BC798918-7CB4-450A-A042-F0B538CA25DE}"/>
-              </a:ext>
-            </a:extLst>
-          </p:cNvPr>
-          <p:cNvSpPr>
-            <a:spLocks noGrp="1"/>
-          </p:cNvSpPr>
-          <p:nvPr>
-            <p:ph type="title"/>
-          </p:nvPr>
-        </p:nvSpPr>
-        <p:spPr>
-          <a:xfrm>
-            <a:off x="1032611" y="0"/>
-            <a:ext cx="10827959" cy="1574800"/>
-          </a:xfrm>
-        </p:spPr>
-        <p:txBody>
-          <a:bodyPr>
-            <a:normAutofit/>
-          </a:bodyPr>
-          <a:lstStyle/>
-          <a:p>
-            <a:pPr algn="ctr"/>
-            <a:r>
-              <a:rPr lang="pt-BR" dirty="0">
-                <a:latin typeface="AlternateGothic2 BT" panose="020B0608020202050204" pitchFamily="34" charset="0"/>
-              </a:rPr>
-              <a:t>CEA055 – Estatística e Probabilidade</a:t>
-            </a:r>
-            <a:br>
-              <a:rPr lang="pt-BR" dirty="0">
-                <a:latin typeface="AlternateGothic2 BT" panose="020B0608020202050204" pitchFamily="34" charset="0"/>
-              </a:rPr>
-            </a:br>
-            <a:r>
-              <a:rPr lang="pt-BR" sz="2200" b="1" dirty="0"/>
-              <a:t>Inferência Estatística</a:t>
-            </a:r>
-            <a:endParaRPr lang="pt-BR" dirty="0">
-              <a:latin typeface="AlternateGothic2 BT" panose="020B0608020202050204" pitchFamily="34" charset="0"/>
-            </a:endParaRPr>
-          </a:p>
-        </p:txBody>
-      </p:sp>
       <mc:AlternateContent xmlns:mc="http://schemas.openxmlformats.org/markup-compatibility/2006" xmlns:a14="http://schemas.microsoft.com/office/drawing/2010/main">
         <mc:Choice Requires="a14">
           <p:sp>
@@ -9616,7 +9222,7 @@
         <p:spPr>
           <a:xfrm>
             <a:off x="361395" y="6488668"/>
-            <a:ext cx="2395336" cy="300210"/>
+            <a:ext cx="7620000" cy="300210"/>
           </a:xfrm>
           <a:prstGeom prst="rect">
             <a:avLst/>
@@ -9631,818 +9237,15 @@
           <a:p>
             <a:r>
               <a:rPr lang="pt-BR" sz="1351" dirty="0"/>
-              <a:t>Professor: Marcos Goulart Lima</a:t>
+              <a:t>CEA055 - Estatística e Probabilidade - Professor: Marcos Goulart Lima</a:t>
             </a:r>
           </a:p>
         </p:txBody>
       </p:sp>
-      <p:pic>
-        <p:nvPicPr>
-          <p:cNvPr id="8" name="Espaço Reservado para Conteúdo 4">
-            <a:extLst>
-              <a:ext uri="{FF2B5EF4-FFF2-40B4-BE49-F238E27FC236}">
-                <a16:creationId xmlns:a16="http://schemas.microsoft.com/office/drawing/2014/main" id="{65AB402D-D1A8-4F31-BA42-34A6F0FC69F9}"/>
-              </a:ext>
-            </a:extLst>
-          </p:cNvPr>
-          <p:cNvPicPr>
-            <a:picLocks noChangeAspect="1"/>
-          </p:cNvPicPr>
-          <p:nvPr/>
-        </p:nvPicPr>
-        <p:blipFill>
-          <a:blip r:embed="rId3">
-            <a:extLst>
-              <a:ext uri="{28A0092B-C50C-407E-A947-70E740481C1C}">
-                <a14:useLocalDpi xmlns:a14="http://schemas.microsoft.com/office/drawing/2010/main" val="0"/>
-              </a:ext>
-            </a:extLst>
-          </a:blip>
-          <a:stretch>
-            <a:fillRect/>
-          </a:stretch>
-        </p:blipFill>
-        <p:spPr>
-          <a:xfrm>
-            <a:off x="62144" y="112237"/>
-            <a:ext cx="588096" cy="1228523"/>
-          </a:xfrm>
-          <a:prstGeom prst="rect">
-            <a:avLst/>
-          </a:prstGeom>
-        </p:spPr>
-      </p:pic>
     </p:spTree>
     <p:extLst>
       <p:ext uri="{BB962C8B-B14F-4D97-AF65-F5344CB8AC3E}">
         <p14:creationId xmlns:p14="http://schemas.microsoft.com/office/powerpoint/2010/main" val="1222582403"/>
-      </p:ext>
-    </p:extLst>
-  </p:cSld>
-  <p:clrMapOvr>
-    <a:masterClrMapping/>
-  </p:clrMapOvr>
-</p:sld>
-</file>
-
-<file path=ppt/slides/slide5.xml><?xml version="1.0" encoding="utf-8"?>
-<p:sld xmlns:a="http://schemas.openxmlformats.org/drawingml/2006/main" xmlns:r="http://schemas.openxmlformats.org/officeDocument/2006/relationships" xmlns:p="http://schemas.openxmlformats.org/presentationml/2006/main">
-  <p:cSld>
-    <p:spTree>
-      <p:nvGrpSpPr>
-        <p:cNvPr id="1" name=""/>
-        <p:cNvGrpSpPr/>
-        <p:nvPr/>
-      </p:nvGrpSpPr>
-      <p:grpSpPr>
-        <a:xfrm>
-          <a:off x="0" y="0"/>
-          <a:ext cx="0" cy="0"/>
-          <a:chOff x="0" y="0"/>
-          <a:chExt cx="0" cy="0"/>
-        </a:xfrm>
-      </p:grpSpPr>
-      <p:sp>
-        <p:nvSpPr>
-          <p:cNvPr id="2" name="Título 1">
-            <a:extLst>
-              <a:ext uri="{FF2B5EF4-FFF2-40B4-BE49-F238E27FC236}">
-                <a16:creationId xmlns:a16="http://schemas.microsoft.com/office/drawing/2014/main" id="{BC798918-7CB4-450A-A042-F0B538CA25DE}"/>
-              </a:ext>
-            </a:extLst>
-          </p:cNvPr>
-          <p:cNvSpPr>
-            <a:spLocks noGrp="1"/>
-          </p:cNvSpPr>
-          <p:nvPr>
-            <p:ph type="title"/>
-          </p:nvPr>
-        </p:nvSpPr>
-        <p:spPr>
-          <a:xfrm>
-            <a:off x="1032611" y="0"/>
-            <a:ext cx="10827959" cy="1574800"/>
-          </a:xfrm>
-        </p:spPr>
-        <p:txBody>
-          <a:bodyPr>
-            <a:normAutofit/>
-          </a:bodyPr>
-          <a:lstStyle/>
-          <a:p>
-            <a:pPr algn="ctr"/>
-            <a:r>
-              <a:rPr lang="pt-BR" dirty="0">
-                <a:latin typeface="AlternateGothic2 BT" panose="020B0608020202050204" pitchFamily="34" charset="0"/>
-              </a:rPr>
-              <a:t>CEA055 – Estatística e Probabilidade</a:t>
-            </a:r>
-            <a:br>
-              <a:rPr lang="pt-BR" dirty="0">
-                <a:latin typeface="AlternateGothic2 BT" panose="020B0608020202050204" pitchFamily="34" charset="0"/>
-              </a:rPr>
-            </a:br>
-            <a:r>
-              <a:rPr lang="pt-BR" sz="2200" b="1" dirty="0"/>
-              <a:t>Inferência Estatística</a:t>
-            </a:r>
-            <a:endParaRPr lang="pt-BR" dirty="0">
-              <a:latin typeface="AlternateGothic2 BT" panose="020B0608020202050204" pitchFamily="34" charset="0"/>
-            </a:endParaRPr>
-          </a:p>
-        </p:txBody>
-      </p:sp>
-      <p:sp>
-        <p:nvSpPr>
-          <p:cNvPr id="6" name="CaixaDeTexto 5">
-            <a:extLst>
-              <a:ext uri="{FF2B5EF4-FFF2-40B4-BE49-F238E27FC236}">
-                <a16:creationId xmlns:a16="http://schemas.microsoft.com/office/drawing/2014/main" id="{720B10DA-C761-4DEE-8D86-E170E1C2E981}"/>
-              </a:ext>
-            </a:extLst>
-          </p:cNvPr>
-          <p:cNvSpPr txBox="1"/>
-          <p:nvPr/>
-        </p:nvSpPr>
-        <p:spPr>
-          <a:xfrm>
-            <a:off x="650241" y="1506234"/>
-            <a:ext cx="10908714" cy="3970318"/>
-          </a:xfrm>
-          <a:prstGeom prst="rect">
-            <a:avLst/>
-          </a:prstGeom>
-          <a:noFill/>
-        </p:spPr>
-        <p:txBody>
-          <a:bodyPr wrap="square" rtlCol="0">
-            <a:spAutoFit/>
-          </a:bodyPr>
-          <a:lstStyle/>
-          <a:p>
-            <a:r>
-              <a:rPr lang="pt-BR" sz="2800" b="1" dirty="0"/>
-              <a:t>Viés de seleção</a:t>
-            </a:r>
-          </a:p>
-          <a:p>
-            <a:endParaRPr lang="pt-BR" sz="2800" dirty="0"/>
-          </a:p>
-          <a:p>
-            <a:r>
-              <a:rPr lang="pt-BR" sz="2800" dirty="0"/>
-              <a:t>Tipos de amostragem</a:t>
-            </a:r>
-          </a:p>
-          <a:p>
-            <a:endParaRPr lang="pt-BR" sz="2800" dirty="0"/>
-          </a:p>
-          <a:p>
-            <a:pPr marL="457200" indent="-457200">
-              <a:buFont typeface="Arial" panose="020B0604020202020204" pitchFamily="34" charset="0"/>
-              <a:buChar char="•"/>
-            </a:pPr>
-            <a:r>
-              <a:rPr lang="pt-BR" sz="2800" dirty="0"/>
-              <a:t>Probabilística: todos tem a mesma probabilidade de serem selecionados</a:t>
-            </a:r>
-          </a:p>
-          <a:p>
-            <a:pPr marL="457200" indent="-457200">
-              <a:buFont typeface="Arial" panose="020B0604020202020204" pitchFamily="34" charset="0"/>
-              <a:buChar char="•"/>
-            </a:pPr>
-            <a:endParaRPr lang="pt-BR" sz="2800" dirty="0"/>
-          </a:p>
-          <a:p>
-            <a:pPr marL="457200" indent="-457200">
-              <a:buFont typeface="Arial" panose="020B0604020202020204" pitchFamily="34" charset="0"/>
-              <a:buChar char="•"/>
-            </a:pPr>
-            <a:r>
-              <a:rPr lang="pt-BR" sz="2800" dirty="0"/>
-              <a:t>Não probabilística: um método é utilizado para selecionar os elementos da amostra</a:t>
-            </a:r>
-          </a:p>
-        </p:txBody>
-      </p:sp>
-      <p:sp>
-        <p:nvSpPr>
-          <p:cNvPr id="3" name="CaixaDeTexto 2">
-            <a:extLst>
-              <a:ext uri="{FF2B5EF4-FFF2-40B4-BE49-F238E27FC236}">
-                <a16:creationId xmlns:a16="http://schemas.microsoft.com/office/drawing/2014/main" id="{19131A04-B5D6-4211-8B49-4615DE5797E9}"/>
-              </a:ext>
-            </a:extLst>
-          </p:cNvPr>
-          <p:cNvSpPr txBox="1"/>
-          <p:nvPr/>
-        </p:nvSpPr>
-        <p:spPr>
-          <a:xfrm>
-            <a:off x="361395" y="6488668"/>
-            <a:ext cx="2395336" cy="300210"/>
-          </a:xfrm>
-          <a:prstGeom prst="rect">
-            <a:avLst/>
-          </a:prstGeom>
-          <a:noFill/>
-        </p:spPr>
-        <p:txBody>
-          <a:bodyPr wrap="none" rtlCol="0">
-            <a:spAutoFit/>
-          </a:bodyPr>
-          <a:lstStyle/>
-          <a:p>
-            <a:r>
-              <a:rPr lang="pt-BR" sz="1351" dirty="0"/>
-              <a:t>Professor: Marcos Goulart Lima</a:t>
-            </a:r>
-          </a:p>
-        </p:txBody>
-      </p:sp>
-      <p:pic>
-        <p:nvPicPr>
-          <p:cNvPr id="8" name="Espaço Reservado para Conteúdo 4">
-            <a:extLst>
-              <a:ext uri="{FF2B5EF4-FFF2-40B4-BE49-F238E27FC236}">
-                <a16:creationId xmlns:a16="http://schemas.microsoft.com/office/drawing/2014/main" id="{65AB402D-D1A8-4F31-BA42-34A6F0FC69F9}"/>
-              </a:ext>
-            </a:extLst>
-          </p:cNvPr>
-          <p:cNvPicPr>
-            <a:picLocks noChangeAspect="1"/>
-          </p:cNvPicPr>
-          <p:nvPr/>
-        </p:nvPicPr>
-        <p:blipFill>
-          <a:blip r:embed="rId2">
-            <a:extLst>
-              <a:ext uri="{28A0092B-C50C-407E-A947-70E740481C1C}">
-                <a14:useLocalDpi xmlns:a14="http://schemas.microsoft.com/office/drawing/2010/main" val="0"/>
-              </a:ext>
-            </a:extLst>
-          </a:blip>
-          <a:stretch>
-            <a:fillRect/>
-          </a:stretch>
-        </p:blipFill>
-        <p:spPr>
-          <a:xfrm>
-            <a:off x="62144" y="112237"/>
-            <a:ext cx="588096" cy="1228523"/>
-          </a:xfrm>
-          <a:prstGeom prst="rect">
-            <a:avLst/>
-          </a:prstGeom>
-        </p:spPr>
-      </p:pic>
-    </p:spTree>
-    <p:extLst>
-      <p:ext uri="{BB962C8B-B14F-4D97-AF65-F5344CB8AC3E}">
-        <p14:creationId xmlns:p14="http://schemas.microsoft.com/office/powerpoint/2010/main" val="439318190"/>
-      </p:ext>
-    </p:extLst>
-  </p:cSld>
-  <p:clrMapOvr>
-    <a:masterClrMapping/>
-  </p:clrMapOvr>
-</p:sld>
-</file>
-
-<file path=ppt/slides/slide51.xml><?xml version="1.0" encoding="utf-8"?>
-<p:sld xmlns:a="http://schemas.openxmlformats.org/drawingml/2006/main" xmlns:r="http://schemas.openxmlformats.org/officeDocument/2006/relationships" xmlns:p="http://schemas.openxmlformats.org/presentationml/2006/main">
-  <p:cSld>
-    <p:spTree>
-      <p:nvGrpSpPr>
-        <p:cNvPr id="1" name=""/>
-        <p:cNvGrpSpPr/>
-        <p:nvPr/>
-      </p:nvGrpSpPr>
-      <p:grpSpPr>
-        <a:xfrm>
-          <a:off x="0" y="0"/>
-          <a:ext cx="0" cy="0"/>
-          <a:chOff x="0" y="0"/>
-          <a:chExt cx="0" cy="0"/>
-        </a:xfrm>
-      </p:grpSpPr>
-      <p:sp>
-        <p:nvSpPr>
-          <p:cNvPr id="2" name="Título 1">
-            <a:extLst>
-              <a:ext uri="{FF2B5EF4-FFF2-40B4-BE49-F238E27FC236}">
-                <a16:creationId xmlns:a16="http://schemas.microsoft.com/office/drawing/2014/main" id="{BC798918-7CB4-450A-A042-F0B538CA25DE}"/>
-              </a:ext>
-            </a:extLst>
-          </p:cNvPr>
-          <p:cNvSpPr>
-            <a:spLocks noGrp="1"/>
-          </p:cNvSpPr>
-          <p:nvPr>
-            <p:ph type="title"/>
-          </p:nvPr>
-        </p:nvSpPr>
-        <p:spPr>
-          <a:xfrm>
-            <a:off x="1032611" y="0"/>
-            <a:ext cx="10827959" cy="1574800"/>
-          </a:xfrm>
-        </p:spPr>
-        <p:txBody>
-          <a:bodyPr>
-            <a:normAutofit/>
-          </a:bodyPr>
-          <a:lstStyle/>
-          <a:p>
-            <a:pPr algn="ctr"/>
-            <a:r>
-              <a:rPr lang="pt-BR" dirty="0">
-                <a:latin typeface="AlternateGothic2 BT" panose="020B0608020202050204" pitchFamily="34" charset="0"/>
-              </a:rPr>
-              <a:t>CEA055 – Estatística e Probabilidade</a:t>
-            </a:r>
-            <a:br>
-              <a:rPr lang="pt-BR" dirty="0">
-                <a:latin typeface="AlternateGothic2 BT" panose="020B0608020202050204" pitchFamily="34" charset="0"/>
-              </a:rPr>
-            </a:br>
-            <a:r>
-              <a:rPr lang="pt-BR" sz="2200" b="1" dirty="0"/>
-              <a:t>População, Amostra e Parâmetros</a:t>
-            </a:r>
-            <a:endParaRPr lang="pt-BR" dirty="0">
-              <a:latin typeface="AlternateGothic2 BT" panose="020B0608020202050204" pitchFamily="34" charset="0"/>
-            </a:endParaRPr>
-          </a:p>
-        </p:txBody>
-      </p:sp>
-      <p:sp>
-        <p:nvSpPr>
-          <p:cNvPr id="6" name="CaixaDeTexto 5">
-            <a:extLst>
-              <a:ext uri="{FF2B5EF4-FFF2-40B4-BE49-F238E27FC236}">
-                <a16:creationId xmlns:a16="http://schemas.microsoft.com/office/drawing/2014/main" id="{720B10DA-C761-4DEE-8D86-E170E1C2E981}"/>
-              </a:ext>
-            </a:extLst>
-          </p:cNvPr>
-          <p:cNvSpPr txBox="1"/>
-          <p:nvPr/>
-        </p:nvSpPr>
-        <p:spPr>
-          <a:xfrm>
-            <a:off x="881687" y="1441868"/>
-            <a:ext cx="10067277" cy="4295185"/>
-          </a:xfrm>
-          <a:prstGeom prst="rect">
-            <a:avLst/>
-          </a:prstGeom>
-          <a:noFill/>
-        </p:spPr>
-        <p:txBody>
-          <a:bodyPr wrap="square" rtlCol="0">
-            <a:spAutoFit/>
-          </a:bodyPr>
-          <a:lstStyle/>
-          <a:p>
-            <a:r>
-              <a:rPr lang="pt-BR" sz="2400" b="1" dirty="0"/>
-              <a:t>Objetivos do aula:</a:t>
-            </a:r>
-          </a:p>
-          <a:p>
-            <a:pPr marL="285737" indent="-285737">
-              <a:buFont typeface="Arial" panose="020B0604020202020204" pitchFamily="34" charset="0"/>
-              <a:buChar char="•"/>
-            </a:pPr>
-            <a:r>
-              <a:rPr lang="pt-BR" sz="2400" dirty="0"/>
-              <a:t>Compreender os conceitos de população e amostra.</a:t>
-            </a:r>
-          </a:p>
-          <a:p>
-            <a:pPr marL="285737" indent="-285737">
-              <a:buFont typeface="Arial" panose="020B0604020202020204" pitchFamily="34" charset="0"/>
-              <a:buChar char="•"/>
-            </a:pPr>
-            <a:r>
-              <a:rPr lang="pt-BR" sz="2400" dirty="0"/>
-              <a:t>Conhecer os tipos de amostragem, com foco na Amostragem Aleatória Simples (AAS).</a:t>
-            </a:r>
-          </a:p>
-          <a:p>
-            <a:pPr marL="285737" indent="-285737">
-              <a:buFont typeface="Arial" panose="020B0604020202020204" pitchFamily="34" charset="0"/>
-              <a:buChar char="•"/>
-            </a:pPr>
-            <a:r>
-              <a:rPr lang="pt-BR" sz="2400" dirty="0"/>
-              <a:t>Diferenciar estatística (medida da amostra) de parâmetro (medida da população).</a:t>
-            </a:r>
-          </a:p>
-          <a:p>
-            <a:r>
-              <a:rPr lang="pt-BR" sz="2400" b="1" dirty="0"/>
-              <a:t xml:space="preserve">Referências: </a:t>
-            </a:r>
-          </a:p>
-          <a:p>
-            <a:pPr marL="457178" indent="-457178">
-              <a:buFont typeface="Arial" panose="020B0604020202020204" pitchFamily="34" charset="0"/>
-              <a:buChar char="•"/>
-            </a:pPr>
-            <a:r>
-              <a:rPr lang="pt-BR" sz="2000" dirty="0"/>
-              <a:t xml:space="preserve">Bussab, Morettin. </a:t>
-            </a:r>
-            <a:r>
-              <a:rPr lang="pt-BR" sz="2000" b="1" dirty="0"/>
-              <a:t>Estatística Básica</a:t>
-            </a:r>
-            <a:r>
-              <a:rPr lang="pt-BR" sz="2000" dirty="0"/>
-              <a:t>, 9ed — Cap. 10 (10.2, 10.4, 10.5, 10.6)</a:t>
-            </a:r>
-          </a:p>
-          <a:p>
-            <a:pPr marL="457178" indent="-457178">
-              <a:buFont typeface="Arial" panose="020B0604020202020204" pitchFamily="34" charset="0"/>
-              <a:buChar char="•"/>
-            </a:pPr>
-            <a:r>
-              <a:rPr lang="pt-BR" sz="2000" dirty="0"/>
-              <a:t xml:space="preserve">Montgomery, Runger. </a:t>
-            </a:r>
-            <a:r>
-              <a:rPr lang="pt-BR" sz="2000" b="1" dirty="0"/>
-              <a:t>Applied Statistics and Probability for Engineers</a:t>
-            </a:r>
-            <a:r>
-              <a:rPr lang="pt-BR" sz="2000" dirty="0"/>
-              <a:t>, 7th ed — Cap. 7 (7.1)</a:t>
-            </a:r>
-          </a:p>
-          <a:p>
-            <a:pPr marL="457178" indent="-457178">
-              <a:buFont typeface="Arial" panose="020B0604020202020204" pitchFamily="34" charset="0"/>
-              <a:buChar char="•"/>
-            </a:pPr>
-            <a:r>
-              <a:rPr lang="pt-BR" sz="2000" dirty="0"/>
-              <a:t xml:space="preserve">Magalhães, Lima. </a:t>
-            </a:r>
-            <a:r>
-              <a:rPr lang="pt-BR" sz="2000" b="1" dirty="0"/>
-              <a:t>Noções de Probabilidade e Estatística</a:t>
-            </a:r>
-            <a:r>
-              <a:rPr lang="pt-BR" sz="2000" dirty="0"/>
-              <a:t>, 5ed — Cap. 7 (7.1, 7.2)</a:t>
-            </a:r>
-          </a:p>
-          <a:p>
-            <a:pPr marL="457178" indent="-457178">
-              <a:buFont typeface="Arial" panose="020B0604020202020204" pitchFamily="34" charset="0"/>
-              <a:buChar char="•"/>
-            </a:pPr>
-            <a:r>
-              <a:rPr lang="pt-BR" sz="2000" dirty="0"/>
-              <a:t xml:space="preserve">Morettin. </a:t>
-            </a:r>
-            <a:r>
-              <a:rPr lang="pt-BR" sz="2000" b="1" dirty="0"/>
-              <a:t>Estatística Básica: Probabilidade e Inferência</a:t>
-            </a:r>
-            <a:r>
-              <a:rPr lang="pt-BR" sz="2000" dirty="0"/>
-              <a:t xml:space="preserve"> — Cap. 7 (7.1, 7.2); Cap. 8 (8.1)</a:t>
-            </a:r>
-          </a:p>
-        </p:txBody>
-      </p:sp>
-      <p:sp>
-        <p:nvSpPr>
-          <p:cNvPr id="3" name="CaixaDeTexto 2">
-            <a:extLst>
-              <a:ext uri="{FF2B5EF4-FFF2-40B4-BE49-F238E27FC236}">
-                <a16:creationId xmlns:a16="http://schemas.microsoft.com/office/drawing/2014/main" id="{19131A04-B5D6-4211-8B49-4615DE5797E9}"/>
-              </a:ext>
-            </a:extLst>
-          </p:cNvPr>
-          <p:cNvSpPr txBox="1"/>
-          <p:nvPr/>
-        </p:nvSpPr>
-        <p:spPr>
-          <a:xfrm>
-            <a:off x="361395" y="6488668"/>
-            <a:ext cx="2395336" cy="300210"/>
-          </a:xfrm>
-          <a:prstGeom prst="rect">
-            <a:avLst/>
-          </a:prstGeom>
-          <a:noFill/>
-        </p:spPr>
-        <p:txBody>
-          <a:bodyPr wrap="none" rtlCol="0">
-            <a:spAutoFit/>
-          </a:bodyPr>
-          <a:lstStyle/>
-          <a:p>
-            <a:r>
-              <a:rPr lang="pt-BR" sz="1351" dirty="0"/>
-              <a:t>Professor: Marcos Goulart Lima</a:t>
-            </a:r>
-          </a:p>
-        </p:txBody>
-      </p:sp>
-      <p:pic>
-        <p:nvPicPr>
-          <p:cNvPr id="8" name="Espaço Reservado para Conteúdo 4">
-            <a:extLst>
-              <a:ext uri="{FF2B5EF4-FFF2-40B4-BE49-F238E27FC236}">
-                <a16:creationId xmlns:a16="http://schemas.microsoft.com/office/drawing/2014/main" id="{65AB402D-D1A8-4F31-BA42-34A6F0FC69F9}"/>
-              </a:ext>
-            </a:extLst>
-          </p:cNvPr>
-          <p:cNvPicPr>
-            <a:picLocks noChangeAspect="1"/>
-          </p:cNvPicPr>
-          <p:nvPr/>
-        </p:nvPicPr>
-        <p:blipFill>
-          <a:blip r:embed="rId2">
-            <a:extLst>
-              <a:ext uri="{28A0092B-C50C-407E-A947-70E740481C1C}">
-                <a14:useLocalDpi xmlns:a14="http://schemas.microsoft.com/office/drawing/2010/main" val="0"/>
-              </a:ext>
-            </a:extLst>
-          </a:blip>
-          <a:stretch>
-            <a:fillRect/>
-          </a:stretch>
-        </p:blipFill>
-        <p:spPr>
-          <a:xfrm>
-            <a:off x="62144" y="112237"/>
-            <a:ext cx="588096" cy="1228523"/>
-          </a:xfrm>
-          <a:prstGeom prst="rect">
-            <a:avLst/>
-          </a:prstGeom>
-        </p:spPr>
-      </p:pic>
-    </p:spTree>
-    <p:extLst>
-      <p:ext uri="{BB962C8B-B14F-4D97-AF65-F5344CB8AC3E}">
-        <p14:creationId xmlns:p14="http://schemas.microsoft.com/office/powerpoint/2010/main" val="1670738953"/>
-      </p:ext>
-    </p:extLst>
-  </p:cSld>
-  <p:clrMapOvr>
-    <a:masterClrMapping/>
-  </p:clrMapOvr>
-</p:sld>
-</file>
-
-<file path=ppt/slides/slide52.xml><?xml version="1.0" encoding="utf-8"?>
-<p:sld xmlns:a="http://schemas.openxmlformats.org/drawingml/2006/main" xmlns:r="http://schemas.openxmlformats.org/officeDocument/2006/relationships" xmlns:p="http://schemas.openxmlformats.org/presentationml/2006/main">
-  <p:cSld>
-    <p:spTree>
-      <p:nvGrpSpPr>
-        <p:cNvPr id="1" name=""/>
-        <p:cNvGrpSpPr/>
-        <p:nvPr/>
-      </p:nvGrpSpPr>
-      <p:grpSpPr>
-        <a:xfrm>
-          <a:off x="0" y="0"/>
-          <a:ext cx="0" cy="0"/>
-          <a:chOff x="0" y="0"/>
-          <a:chExt cx="0" cy="0"/>
-        </a:xfrm>
-      </p:grpSpPr>
-      <p:sp>
-        <p:nvSpPr>
-          <p:cNvPr id="2" name="Título 1">
-            <a:extLst>
-              <a:ext uri="{FF2B5EF4-FFF2-40B4-BE49-F238E27FC236}">
-                <a16:creationId xmlns:a16="http://schemas.microsoft.com/office/drawing/2014/main" id="{BC798918-7CB4-450A-A042-F0B538CA25DE}"/>
-              </a:ext>
-            </a:extLst>
-          </p:cNvPr>
-          <p:cNvSpPr>
-            <a:spLocks noGrp="1"/>
-          </p:cNvSpPr>
-          <p:nvPr>
-            <p:ph type="title"/>
-          </p:nvPr>
-        </p:nvSpPr>
-        <p:spPr>
-          <a:xfrm>
-            <a:off x="1032611" y="0"/>
-            <a:ext cx="10827959" cy="1574800"/>
-          </a:xfrm>
-        </p:spPr>
-        <p:txBody>
-          <a:bodyPr>
-            <a:normAutofit/>
-          </a:bodyPr>
-          <a:lstStyle/>
-          <a:p>
-            <a:pPr algn="ctr"/>
-            <a:r>
-              <a:rPr lang="pt-BR" dirty="0">
-                <a:latin typeface="AlternateGothic2 BT" panose="020B0608020202050204" pitchFamily="34" charset="0"/>
-              </a:rPr>
-              <a:t>CEA055 – Estatística e Probabilidade</a:t>
-            </a:r>
-            <a:br>
-              <a:rPr lang="pt-BR" dirty="0">
-                <a:latin typeface="AlternateGothic2 BT" panose="020B0608020202050204" pitchFamily="34" charset="0"/>
-              </a:rPr>
-            </a:br>
-            <a:r>
-              <a:rPr lang="pt-BR" sz="2200" b="1" dirty="0"/>
-              <a:t>População e Amostra — Atividades</a:t>
-            </a:r>
-            <a:endParaRPr lang="pt-BR" dirty="0">
-              <a:latin typeface="AlternateGothic2 BT" panose="020B0608020202050204" pitchFamily="34" charset="0"/>
-            </a:endParaRPr>
-          </a:p>
-        </p:txBody>
-      </p:sp>
-      <p:sp>
-        <p:nvSpPr>
-          <p:cNvPr id="6" name="CaixaDeTexto 5">
-            <a:extLst>
-              <a:ext uri="{FF2B5EF4-FFF2-40B4-BE49-F238E27FC236}">
-                <a16:creationId xmlns:a16="http://schemas.microsoft.com/office/drawing/2014/main" id="{720B10DA-C761-4DEE-8D86-E170E1C2E981}"/>
-              </a:ext>
-            </a:extLst>
-          </p:cNvPr>
-          <p:cNvSpPr txBox="1"/>
-          <p:nvPr/>
-        </p:nvSpPr>
-        <p:spPr>
-          <a:xfrm>
-            <a:off x="881687" y="1441868"/>
-            <a:ext cx="10067277" cy="4295185"/>
-          </a:xfrm>
-          <a:prstGeom prst="rect">
-            <a:avLst/>
-          </a:prstGeom>
-          <a:noFill/>
-        </p:spPr>
-        <p:txBody>
-          <a:bodyPr wrap="square" rtlCol="0">
-            <a:spAutoFit/>
-          </a:bodyPr>
-          <a:lstStyle/>
-          <a:p>
-            <a:r>
-              <a:rPr lang="pt-BR" sz="2400" b="1" dirty="0"/>
-              <a:t>Atividades referentes à aula</a:t>
-            </a:r>
-          </a:p>
-          <a:p>
-            <a:r>
-              <a:rPr lang="pt-BR" sz="2000" dirty="0"/>
-              <a:t xml:space="preserve">Leitura recomendada: </a:t>
-            </a:r>
-          </a:p>
-          <a:p>
-            <a:pPr marL="457178" indent="-457178">
-              <a:buFont typeface="Arial" panose="020B0604020202020204" pitchFamily="34" charset="0"/>
-              <a:buChar char="•"/>
-            </a:pPr>
-            <a:r>
-              <a:rPr lang="pt-BR" sz="2000" dirty="0"/>
-              <a:t>Bussab &amp; Morettin — Cap. 10: 10.2, 10.4, 10.5, 10.6</a:t>
-            </a:r>
-          </a:p>
-          <a:p>
-            <a:pPr marL="457178" indent="-457178">
-              <a:buFont typeface="Arial" panose="020B0604020202020204" pitchFamily="34" charset="0"/>
-              <a:buChar char="•"/>
-            </a:pPr>
-            <a:r>
-              <a:rPr lang="pt-BR" sz="2000" dirty="0"/>
-              <a:t>Montgomery &amp; Runger — Cap. 7: 7.1</a:t>
-            </a:r>
-          </a:p>
-          <a:p>
-            <a:pPr marL="457178" indent="-457178">
-              <a:buFont typeface="Arial" panose="020B0604020202020204" pitchFamily="34" charset="0"/>
-              <a:buChar char="•"/>
-            </a:pPr>
-            <a:r>
-              <a:rPr lang="pt-BR" sz="2000" dirty="0"/>
-              <a:t>Magalhães &amp; Lima — Cap. 7: 7.1, 7.2</a:t>
-            </a:r>
-          </a:p>
-          <a:p>
-            <a:pPr marL="457178" indent="-457178">
-              <a:buFont typeface="Arial" panose="020B0604020202020204" pitchFamily="34" charset="0"/>
-              <a:buChar char="•"/>
-            </a:pPr>
-            <a:r>
-              <a:rPr lang="pt-BR" sz="2000" dirty="0"/>
-              <a:t>Morettin — Cap. 7: 7.1, 7.2; Cap. 8: 8.1</a:t>
-            </a:r>
-          </a:p>
-          <a:p>
-            <a:r>
-              <a:rPr lang="pt-BR" sz="2000" dirty="0"/>
-              <a:t>Exercícios recomendados:</a:t>
-            </a:r>
-          </a:p>
-          <a:p>
-            <a:pPr marL="457178" indent="-457178">
-              <a:buFont typeface="Arial" panose="020B0604020202020204" pitchFamily="34" charset="0"/>
-              <a:buChar char="•"/>
-            </a:pPr>
-            <a:r>
-              <a:rPr lang="pt-BR" sz="2000" dirty="0"/>
-              <a:t>Bussab, Cap. 10: exercícios sobre população, amostra e tipos de amostragem</a:t>
-            </a:r>
-          </a:p>
-        </p:txBody>
-      </p:sp>
-      <p:sp>
-        <p:nvSpPr>
-          <p:cNvPr id="3" name="CaixaDeTexto 2">
-            <a:extLst>
-              <a:ext uri="{FF2B5EF4-FFF2-40B4-BE49-F238E27FC236}">
-                <a16:creationId xmlns:a16="http://schemas.microsoft.com/office/drawing/2014/main" id="{19131A04-B5D6-4211-8B49-4615DE5797E9}"/>
-              </a:ext>
-            </a:extLst>
-          </p:cNvPr>
-          <p:cNvSpPr txBox="1"/>
-          <p:nvPr/>
-        </p:nvSpPr>
-        <p:spPr>
-          <a:xfrm>
-            <a:off x="361395" y="6488668"/>
-            <a:ext cx="2395336" cy="300210"/>
-          </a:xfrm>
-          <a:prstGeom prst="rect">
-            <a:avLst/>
-          </a:prstGeom>
-          <a:noFill/>
-        </p:spPr>
-        <p:txBody>
-          <a:bodyPr wrap="none" rtlCol="0">
-            <a:spAutoFit/>
-          </a:bodyPr>
-          <a:lstStyle/>
-          <a:p>
-            <a:r>
-              <a:rPr lang="pt-BR" sz="1351" dirty="0"/>
-              <a:t>Professor: Marcos Goulart Lima</a:t>
-            </a:r>
-          </a:p>
-        </p:txBody>
-      </p:sp>
-      <p:pic>
-        <p:nvPicPr>
-          <p:cNvPr id="8" name="Espaço Reservado para Conteúdo 4">
-            <a:extLst>
-              <a:ext uri="{FF2B5EF4-FFF2-40B4-BE49-F238E27FC236}">
-                <a16:creationId xmlns:a16="http://schemas.microsoft.com/office/drawing/2014/main" id="{65AB402D-D1A8-4F31-BA42-34A6F0FC69F9}"/>
-              </a:ext>
-            </a:extLst>
-          </p:cNvPr>
-          <p:cNvPicPr>
-            <a:picLocks noChangeAspect="1"/>
-          </p:cNvPicPr>
-          <p:nvPr/>
-        </p:nvPicPr>
-        <p:blipFill>
-          <a:blip r:embed="rId2">
-            <a:extLst>
-              <a:ext uri="{28A0092B-C50C-407E-A947-70E740481C1C}">
-                <a14:useLocalDpi xmlns:a14="http://schemas.microsoft.com/office/drawing/2010/main" val="0"/>
-              </a:ext>
-            </a:extLst>
-          </a:blip>
-          <a:stretch>
-            <a:fillRect/>
-          </a:stretch>
-        </p:blipFill>
-        <p:spPr>
-          <a:xfrm>
-            <a:off x="62144" y="112237"/>
-            <a:ext cx="588096" cy="1228523"/>
-          </a:xfrm>
-          <a:prstGeom prst="rect">
-            <a:avLst/>
-          </a:prstGeom>
-        </p:spPr>
-      </p:pic>
-    </p:spTree>
-    <p:extLst>
-      <p:ext uri="{BB962C8B-B14F-4D97-AF65-F5344CB8AC3E}">
-        <p14:creationId xmlns:p14="http://schemas.microsoft.com/office/powerpoint/2010/main" val="1670738953"/>
       </p:ext>
     </p:extLst>
   </p:cSld>
@@ -10471,56 +9274,6 @@
       </p:grpSpPr>
       <p:sp>
         <p:nvSpPr>
-          <p:cNvPr id="2" name="Título 1">
-            <a:extLst>
-              <a:ext uri="{FF2B5EF4-FFF2-40B4-BE49-F238E27FC236}">
-                <a16:creationId xmlns:a16="http://schemas.microsoft.com/office/drawing/2014/main" id="{BC798918-7CB4-450A-A042-F0B538CA25DE}"/>
-              </a:ext>
-            </a:extLst>
-          </p:cNvPr>
-          <p:cNvSpPr>
-            <a:spLocks noGrp="1"/>
-          </p:cNvSpPr>
-          <p:nvPr>
-            <p:ph type="title"/>
-          </p:nvPr>
-        </p:nvSpPr>
-        <p:spPr>
-          <a:xfrm>
-            <a:off x="1032611" y="0"/>
-            <a:ext cx="10827959" cy="1574800"/>
-          </a:xfrm>
-        </p:spPr>
-        <p:txBody>
-          <a:bodyPr>
-            <a:normAutofit/>
-          </a:bodyPr>
-          <a:lstStyle/>
-          <a:p>
-            <a:pPr algn="ctr"/>
-            <a:r>
-              <a:rPr lang="pt-BR" dirty="0">
-                <a:latin typeface="AlternateGothic2 BT" panose="020B0608020202050204" pitchFamily="34" charset="0"/>
-              </a:rPr>
-              <a:t>CEA055 – Estatística e Probabilidade</a:t>
-            </a:r>
-            <a:br>
-              <a:rPr lang="pt-BR" dirty="0">
-                <a:latin typeface="AlternateGothic2 BT" panose="020B0608020202050204" pitchFamily="34" charset="0"/>
-              </a:rPr>
-            </a:br>
-            <a:r>
-              <a:rPr lang="pt-BR" sz="2200" b="1" dirty="0"/>
-              <a:t>Inferência Estatística</a:t>
-            </a:r>
-            <a:endParaRPr lang="pt-BR" dirty="0">
-              <a:latin typeface="AlternateGothic2 BT" panose="020B0608020202050204" pitchFamily="34" charset="0"/>
-            </a:endParaRPr>
-          </a:p>
-        </p:txBody>
-      </p:sp>
-      <p:sp>
-        <p:nvSpPr>
           <p:cNvPr id="6" name="CaixaDeTexto 5">
             <a:extLst>
               <a:ext uri="{FF2B5EF4-FFF2-40B4-BE49-F238E27FC236}">
@@ -10534,7 +9287,7 @@
         <p:spPr>
           <a:xfrm>
             <a:off x="650241" y="1506234"/>
-            <a:ext cx="10908714" cy="1384995"/>
+            <a:ext cx="10908714" cy="3970318"/>
           </a:xfrm>
           <a:prstGeom prst="rect">
             <a:avLst/>
@@ -10547,13 +9300,31 @@
           </a:bodyPr>
           <a:lstStyle/>
           <a:p>
+            <a:r>
+              <a:rPr lang="pt-BR" sz="2800" b="1" dirty="0"/>
+              <a:t>Viés de seleção</a:t>
+            </a:r>
+          </a:p>
+          <a:p>
+            <a:endParaRPr lang="pt-BR" sz="2800" dirty="0"/>
+          </a:p>
+          <a:p>
+            <a:r>
+              <a:rPr lang="pt-BR" sz="2800" dirty="0"/>
+              <a:t>Tipos de amostragem</a:t>
+            </a:r>
+          </a:p>
+          <a:p>
+            <a:endParaRPr lang="pt-BR" sz="2800" dirty="0"/>
+          </a:p>
+          <a:p>
             <a:pPr marL="457200" indent="-457200">
               <a:buFont typeface="Arial" panose="020B0604020202020204" pitchFamily="34" charset="0"/>
               <a:buChar char="•"/>
             </a:pPr>
             <a:r>
-              <a:rPr lang="pt-BR" sz="2800" b="1" dirty="0"/>
-              <a:t>Viés de coleta de dados</a:t>
+              <a:rPr lang="pt-BR" sz="2800" dirty="0"/>
+              <a:t>Probabilística: todos tem a mesma probabilidade de serem selecionados</a:t>
             </a:r>
           </a:p>
           <a:p>
@@ -10561,7 +9332,7 @@
               <a:buFont typeface="Arial" panose="020B0604020202020204" pitchFamily="34" charset="0"/>
               <a:buChar char="•"/>
             </a:pPr>
-            <a:endParaRPr lang="pt-BR" sz="2800" b="1" dirty="0"/>
+            <a:endParaRPr lang="pt-BR" sz="2800" dirty="0"/>
           </a:p>
           <a:p>
             <a:pPr marL="457200" indent="-457200">
@@ -10569,10 +9340,9 @@
               <a:buChar char="•"/>
             </a:pPr>
             <a:r>
-              <a:rPr lang="pt-BR" sz="2800" b="1" dirty="0"/>
-              <a:t>Viés de estimação</a:t>
-            </a:r>
-            <a:endParaRPr lang="pt-BR" sz="2800" dirty="0"/>
+              <a:rPr lang="pt-BR" sz="2800" dirty="0"/>
+              <a:t>Não probabilística: um método é utilizado para selecionar os elementos da amostra</a:t>
+            </a:r>
           </a:p>
         </p:txBody>
       </p:sp>
@@ -10591,7 +9361,7 @@
         <p:spPr>
           <a:xfrm>
             <a:off x="361395" y="6488668"/>
-            <a:ext cx="2395336" cy="300210"/>
+            <a:ext cx="7620000" cy="300210"/>
           </a:xfrm>
           <a:prstGeom prst="rect">
             <a:avLst/>
@@ -10606,51 +9376,15 @@
           <a:p>
             <a:r>
               <a:rPr lang="pt-BR" sz="1351" dirty="0"/>
-              <a:t>Professor: Marcos Goulart Lima</a:t>
+              <a:t>CEA055 - Estatística e Probabilidade - Professor: Marcos Goulart Lima</a:t>
             </a:r>
           </a:p>
         </p:txBody>
       </p:sp>
-      <p:pic>
-        <p:nvPicPr>
-          <p:cNvPr id="8" name="Espaço Reservado para Conteúdo 4">
-            <a:extLst>
-              <a:ext uri="{FF2B5EF4-FFF2-40B4-BE49-F238E27FC236}">
-                <a16:creationId xmlns:a16="http://schemas.microsoft.com/office/drawing/2014/main" id="{65AB402D-D1A8-4F31-BA42-34A6F0FC69F9}"/>
-              </a:ext>
-            </a:extLst>
-          </p:cNvPr>
-          <p:cNvPicPr>
-            <a:picLocks noChangeAspect="1"/>
-          </p:cNvPicPr>
-          <p:nvPr/>
-        </p:nvPicPr>
-        <p:blipFill>
-          <a:blip r:embed="rId2">
-            <a:extLst>
-              <a:ext uri="{28A0092B-C50C-407E-A947-70E740481C1C}">
-                <a14:useLocalDpi xmlns:a14="http://schemas.microsoft.com/office/drawing/2010/main" val="0"/>
-              </a:ext>
-            </a:extLst>
-          </a:blip>
-          <a:stretch>
-            <a:fillRect/>
-          </a:stretch>
-        </p:blipFill>
-        <p:spPr>
-          <a:xfrm>
-            <a:off x="62144" y="112237"/>
-            <a:ext cx="588096" cy="1228523"/>
-          </a:xfrm>
-          <a:prstGeom prst="rect">
-            <a:avLst/>
-          </a:prstGeom>
-        </p:spPr>
-      </p:pic>
     </p:spTree>
     <p:extLst>
       <p:ext uri="{BB962C8B-B14F-4D97-AF65-F5344CB8AC3E}">
-        <p14:creationId xmlns:p14="http://schemas.microsoft.com/office/powerpoint/2010/main" val="2822183944"/>
+        <p14:creationId xmlns:p14="http://schemas.microsoft.com/office/powerpoint/2010/main" val="439318190"/>
       </p:ext>
     </p:extLst>
   </p:cSld>
@@ -10679,56 +9413,6 @@
       </p:grpSpPr>
       <p:sp>
         <p:nvSpPr>
-          <p:cNvPr id="2" name="Título 1">
-            <a:extLst>
-              <a:ext uri="{FF2B5EF4-FFF2-40B4-BE49-F238E27FC236}">
-                <a16:creationId xmlns:a16="http://schemas.microsoft.com/office/drawing/2014/main" id="{BC798918-7CB4-450A-A042-F0B538CA25DE}"/>
-              </a:ext>
-            </a:extLst>
-          </p:cNvPr>
-          <p:cNvSpPr>
-            <a:spLocks noGrp="1"/>
-          </p:cNvSpPr>
-          <p:nvPr>
-            <p:ph type="title"/>
-          </p:nvPr>
-        </p:nvSpPr>
-        <p:spPr>
-          <a:xfrm>
-            <a:off x="1032611" y="0"/>
-            <a:ext cx="10827959" cy="1574800"/>
-          </a:xfrm>
-        </p:spPr>
-        <p:txBody>
-          <a:bodyPr>
-            <a:normAutofit/>
-          </a:bodyPr>
-          <a:lstStyle/>
-          <a:p>
-            <a:pPr algn="ctr"/>
-            <a:r>
-              <a:rPr lang="pt-BR" dirty="0">
-                <a:latin typeface="AlternateGothic2 BT" panose="020B0608020202050204" pitchFamily="34" charset="0"/>
-              </a:rPr>
-              <a:t>CEA055 – Estatística e Probabilidade</a:t>
-            </a:r>
-            <a:br>
-              <a:rPr lang="pt-BR" dirty="0">
-                <a:latin typeface="AlternateGothic2 BT" panose="020B0608020202050204" pitchFamily="34" charset="0"/>
-              </a:rPr>
-            </a:br>
-            <a:r>
-              <a:rPr lang="pt-BR" sz="2200" b="1" dirty="0"/>
-              <a:t>Inferência Estatística</a:t>
-            </a:r>
-            <a:endParaRPr lang="pt-BR" dirty="0">
-              <a:latin typeface="AlternateGothic2 BT" panose="020B0608020202050204" pitchFamily="34" charset="0"/>
-            </a:endParaRPr>
-          </a:p>
-        </p:txBody>
-      </p:sp>
-      <p:sp>
-        <p:nvSpPr>
           <p:cNvPr id="6" name="CaixaDeTexto 5">
             <a:extLst>
               <a:ext uri="{FF2B5EF4-FFF2-40B4-BE49-F238E27FC236}">
@@ -10742,7 +9426,7 @@
         <p:spPr>
           <a:xfrm>
             <a:off x="650241" y="1506234"/>
-            <a:ext cx="10908714" cy="4832092"/>
+            <a:ext cx="10908714" cy="1384995"/>
           </a:xfrm>
           <a:prstGeom prst="rect">
             <a:avLst/>
@@ -10755,36 +9439,13 @@
           </a:bodyPr>
           <a:lstStyle/>
           <a:p>
-            <a:r>
-              <a:rPr lang="pt-BR" sz="2800" b="1" dirty="0"/>
-              <a:t>Exemplos</a:t>
-            </a:r>
-          </a:p>
-          <a:p>
-            <a:pPr marL="514350" indent="-514350">
-              <a:buAutoNum type="arabicParenR"/>
-            </a:pPr>
-            <a:r>
-              <a:rPr lang="pt-BR" sz="2800" dirty="0"/>
-              <a:t>Consideremos uma pesquisa para estudar os salários dos 500 funcionários da Companhia MB. Seleciona-se uma amostra de 36 indivíduos, e anotam-se os seus salários.</a:t>
-            </a:r>
-          </a:p>
-          <a:p>
             <a:pPr marL="457200" indent="-457200">
               <a:buFont typeface="Arial" panose="020B0604020202020204" pitchFamily="34" charset="0"/>
               <a:buChar char="•"/>
             </a:pPr>
             <a:r>
-              <a:rPr lang="pt-BR" sz="2800" dirty="0"/>
-              <a:t xml:space="preserve"> </a:t>
-            </a:r>
-            <a:r>
               <a:rPr lang="pt-BR" sz="2800" b="1" dirty="0"/>
-              <a:t xml:space="preserve">A variável </a:t>
-            </a:r>
-            <a:r>
-              <a:rPr lang="pt-BR" sz="2800" dirty="0"/>
-              <a:t>aleatória a ser observada é “salário”.</a:t>
+              <a:t>Viés de coleta de dados</a:t>
             </a:r>
           </a:p>
           <a:p>
@@ -10792,18 +9453,7 @@
               <a:buFont typeface="Arial" panose="020B0604020202020204" pitchFamily="34" charset="0"/>
               <a:buChar char="•"/>
             </a:pPr>
-            <a:r>
-              <a:rPr lang="pt-BR" sz="2800" dirty="0"/>
-              <a:t xml:space="preserve"> </a:t>
-            </a:r>
-            <a:r>
-              <a:rPr lang="pt-BR" sz="2800" b="1" dirty="0"/>
-              <a:t xml:space="preserve">A população </a:t>
-            </a:r>
-            <a:r>
-              <a:rPr lang="pt-BR" sz="2800" dirty="0"/>
-              <a:t>é formada pelos 500 funcionários da companhia.</a:t>
-            </a:r>
+            <a:endParaRPr lang="pt-BR" sz="2800" b="1" dirty="0"/>
           </a:p>
           <a:p>
             <a:pPr marL="457200" indent="-457200">
@@ -10811,26 +9461,10 @@
               <a:buChar char="•"/>
             </a:pPr>
             <a:r>
-              <a:rPr lang="pt-BR" sz="2800" dirty="0"/>
-              <a:t xml:space="preserve"> </a:t>
-            </a:r>
-            <a:r>
               <a:rPr lang="pt-BR" sz="2800" b="1" dirty="0"/>
-              <a:t xml:space="preserve">A amostra </a:t>
-            </a:r>
-            <a:r>
-              <a:rPr lang="pt-BR" sz="2800" dirty="0"/>
-              <a:t xml:space="preserve">é constituída pelos 36 indivíduos selecionados. </a:t>
-            </a:r>
-          </a:p>
-          <a:p>
+              <a:t>Viés de estimação</a:t>
+            </a:r>
             <a:endParaRPr lang="pt-BR" sz="2800" dirty="0"/>
-          </a:p>
-          <a:p>
-            <a:r>
-              <a:rPr lang="pt-BR" sz="2800" dirty="0"/>
-              <a:t>Podemos estudar a distribuição dos salários na amostra, e esperamos que esta reflita a distribuição de todos os salários, desde que a amostra tenha sido escolhida com cuidado.</a:t>
-            </a:r>
           </a:p>
         </p:txBody>
       </p:sp>
@@ -10849,7 +9483,7 @@
         <p:spPr>
           <a:xfrm>
             <a:off x="361395" y="6488668"/>
-            <a:ext cx="2395336" cy="300210"/>
+            <a:ext cx="7620000" cy="300210"/>
           </a:xfrm>
           <a:prstGeom prst="rect">
             <a:avLst/>
@@ -10864,51 +9498,15 @@
           <a:p>
             <a:r>
               <a:rPr lang="pt-BR" sz="1351" dirty="0"/>
-              <a:t>Professor: Marcos Goulart Lima</a:t>
+              <a:t>CEA055 - Estatística e Probabilidade - Professor: Marcos Goulart Lima</a:t>
             </a:r>
           </a:p>
         </p:txBody>
       </p:sp>
-      <p:pic>
-        <p:nvPicPr>
-          <p:cNvPr id="8" name="Espaço Reservado para Conteúdo 4">
-            <a:extLst>
-              <a:ext uri="{FF2B5EF4-FFF2-40B4-BE49-F238E27FC236}">
-                <a16:creationId xmlns:a16="http://schemas.microsoft.com/office/drawing/2014/main" id="{65AB402D-D1A8-4F31-BA42-34A6F0FC69F9}"/>
-              </a:ext>
-            </a:extLst>
-          </p:cNvPr>
-          <p:cNvPicPr>
-            <a:picLocks noChangeAspect="1"/>
-          </p:cNvPicPr>
-          <p:nvPr/>
-        </p:nvPicPr>
-        <p:blipFill>
-          <a:blip r:embed="rId2">
-            <a:extLst>
-              <a:ext uri="{28A0092B-C50C-407E-A947-70E740481C1C}">
-                <a14:useLocalDpi xmlns:a14="http://schemas.microsoft.com/office/drawing/2010/main" val="0"/>
-              </a:ext>
-            </a:extLst>
-          </a:blip>
-          <a:stretch>
-            <a:fillRect/>
-          </a:stretch>
-        </p:blipFill>
-        <p:spPr>
-          <a:xfrm>
-            <a:off x="62144" y="112237"/>
-            <a:ext cx="588096" cy="1228523"/>
-          </a:xfrm>
-          <a:prstGeom prst="rect">
-            <a:avLst/>
-          </a:prstGeom>
-        </p:spPr>
-      </p:pic>
     </p:spTree>
     <p:extLst>
       <p:ext uri="{BB962C8B-B14F-4D97-AF65-F5344CB8AC3E}">
-        <p14:creationId xmlns:p14="http://schemas.microsoft.com/office/powerpoint/2010/main" val="3896344620"/>
+        <p14:creationId xmlns:p14="http://schemas.microsoft.com/office/powerpoint/2010/main" val="2822183944"/>
       </p:ext>
     </p:extLst>
   </p:cSld>
@@ -10937,56 +9535,6 @@
       </p:grpSpPr>
       <p:sp>
         <p:nvSpPr>
-          <p:cNvPr id="2" name="Título 1">
-            <a:extLst>
-              <a:ext uri="{FF2B5EF4-FFF2-40B4-BE49-F238E27FC236}">
-                <a16:creationId xmlns:a16="http://schemas.microsoft.com/office/drawing/2014/main" id="{BC798918-7CB4-450A-A042-F0B538CA25DE}"/>
-              </a:ext>
-            </a:extLst>
-          </p:cNvPr>
-          <p:cNvSpPr>
-            <a:spLocks noGrp="1"/>
-          </p:cNvSpPr>
-          <p:nvPr>
-            <p:ph type="title"/>
-          </p:nvPr>
-        </p:nvSpPr>
-        <p:spPr>
-          <a:xfrm>
-            <a:off x="1032611" y="0"/>
-            <a:ext cx="10827959" cy="1574800"/>
-          </a:xfrm>
-        </p:spPr>
-        <p:txBody>
-          <a:bodyPr>
-            <a:normAutofit/>
-          </a:bodyPr>
-          <a:lstStyle/>
-          <a:p>
-            <a:pPr algn="ctr"/>
-            <a:r>
-              <a:rPr lang="pt-BR" dirty="0">
-                <a:latin typeface="AlternateGothic2 BT" panose="020B0608020202050204" pitchFamily="34" charset="0"/>
-              </a:rPr>
-              <a:t>CEA307 – Estatística e Probabilidade</a:t>
-            </a:r>
-            <a:br>
-              <a:rPr lang="pt-BR" dirty="0">
-                <a:latin typeface="AlternateGothic2 BT" panose="020B0608020202050204" pitchFamily="34" charset="0"/>
-              </a:rPr>
-            </a:br>
-            <a:r>
-              <a:rPr lang="pt-BR" sz="2200" b="1" dirty="0"/>
-              <a:t xml:space="preserve">Aula 10 - Inferência Estatística – Parte 1 </a:t>
-            </a:r>
-            <a:endParaRPr lang="pt-BR" dirty="0">
-              <a:latin typeface="AlternateGothic2 BT" panose="020B0608020202050204" pitchFamily="34" charset="0"/>
-            </a:endParaRPr>
-          </a:p>
-        </p:txBody>
-      </p:sp>
-      <p:sp>
-        <p:nvSpPr>
           <p:cNvPr id="6" name="CaixaDeTexto 5">
             <a:extLst>
               <a:ext uri="{FF2B5EF4-FFF2-40B4-BE49-F238E27FC236}">
@@ -11000,7 +9548,7 @@
         <p:spPr>
           <a:xfrm>
             <a:off x="650241" y="1506234"/>
-            <a:ext cx="10908714" cy="3539430"/>
+            <a:ext cx="10908714" cy="4832092"/>
           </a:xfrm>
           <a:prstGeom prst="rect">
             <a:avLst/>
@@ -11013,19 +9561,18 @@
           </a:bodyPr>
           <a:lstStyle/>
           <a:p>
+            <a:r>
+              <a:rPr lang="pt-BR" sz="2800" b="1" dirty="0"/>
+              <a:t>Exemplos</a:t>
+            </a:r>
+          </a:p>
+          <a:p>
             <a:pPr marL="514350" indent="-514350">
-              <a:buFont typeface="+mj-lt"/>
-              <a:buAutoNum type="arabicParenR" startAt="2"/>
+              <a:buAutoNum type="arabicParenR"/>
             </a:pPr>
             <a:r>
               <a:rPr lang="pt-BR" sz="2800" dirty="0"/>
-              <a:t>Queremos estudar a proporção de indivíduos na cidade A que são favoráveis a certo projeto governamental. Uma amostra de 200 pessoas é sorteada, e a opinião de cada uma é registrada como sendo a favor ou contra o projeto.</a:t>
-            </a:r>
-          </a:p>
-          <a:p>
-            <a:r>
-              <a:rPr lang="pt-BR" sz="2800" dirty="0"/>
-              <a:t xml:space="preserve"> </a:t>
+              <a:t>Consideremos uma pesquisa para estudar os salários dos 500 funcionários da Companhia MB. Seleciona-se uma amostra de 36 indivíduos, e anotam-se os seus salários.</a:t>
             </a:r>
           </a:p>
           <a:p>
@@ -11034,12 +9581,16 @@
               <a:buChar char="•"/>
             </a:pPr>
             <a:r>
+              <a:rPr lang="pt-BR" sz="2800" dirty="0"/>
+              <a:t xml:space="preserve"> </a:t>
+            </a:r>
+            <a:r>
               <a:rPr lang="pt-BR" sz="2800" b="1" dirty="0"/>
-              <a:t>A variável</a:t>
+              <a:t xml:space="preserve">A variável </a:t>
             </a:r>
             <a:r>
               <a:rPr lang="pt-BR" sz="2800" dirty="0"/>
-              <a:t>, pode ser, X=1 (favorável) e X=0 (contrário).</a:t>
+              <a:t>aleatória a ser observada é “salário”.</a:t>
             </a:r>
           </a:p>
           <a:p>
@@ -11048,12 +9599,16 @@
               <a:buChar char="•"/>
             </a:pPr>
             <a:r>
+              <a:rPr lang="pt-BR" sz="2800" dirty="0"/>
+              <a:t xml:space="preserve"> </a:t>
+            </a:r>
+            <a:r>
               <a:rPr lang="pt-BR" sz="2800" b="1" dirty="0"/>
               <a:t xml:space="preserve">A população </a:t>
             </a:r>
             <a:r>
               <a:rPr lang="pt-BR" sz="2800" dirty="0"/>
-              <a:t>consiste de todos os moradores da cidade.</a:t>
+              <a:t>é formada pelos 500 funcionários da companhia.</a:t>
             </a:r>
           </a:p>
           <a:p>
@@ -11062,12 +9617,25 @@
               <a:buChar char="•"/>
             </a:pPr>
             <a:r>
+              <a:rPr lang="pt-BR" sz="2800" dirty="0"/>
+              <a:t xml:space="preserve"> </a:t>
+            </a:r>
+            <a:r>
               <a:rPr lang="pt-BR" sz="2800" b="1" dirty="0"/>
-              <a:t>Amostra</a:t>
+              <a:t xml:space="preserve">A amostra </a:t>
             </a:r>
             <a:r>
               <a:rPr lang="pt-BR" sz="2800" dirty="0"/>
-              <a:t xml:space="preserve"> é formada pelas 200 pessoas sorteadas</a:t>
+              <a:t xml:space="preserve">é constituída pelos 36 indivíduos selecionados. </a:t>
+            </a:r>
+          </a:p>
+          <a:p>
+            <a:endParaRPr lang="pt-BR" sz="2800" dirty="0"/>
+          </a:p>
+          <a:p>
+            <a:r>
+              <a:rPr lang="pt-BR" sz="2800" dirty="0"/>
+              <a:t>Podemos estudar a distribuição dos salários na amostra, e esperamos que esta reflita a distribuição de todos os salários, desde que a amostra tenha sido escolhida com cuidado.</a:t>
             </a:r>
           </a:p>
         </p:txBody>
@@ -11087,7 +9655,7 @@
         <p:spPr>
           <a:xfrm>
             <a:off x="361395" y="6488668"/>
-            <a:ext cx="2395336" cy="300210"/>
+            <a:ext cx="7620000" cy="300210"/>
           </a:xfrm>
           <a:prstGeom prst="rect">
             <a:avLst/>
@@ -11102,51 +9670,15 @@
           <a:p>
             <a:r>
               <a:rPr lang="pt-BR" sz="1351" dirty="0"/>
-              <a:t>Professor: Marcos Goulart Lima</a:t>
+              <a:t>CEA055 - Estatística e Probabilidade - Professor: Marcos Goulart Lima</a:t>
             </a:r>
           </a:p>
         </p:txBody>
       </p:sp>
-      <p:pic>
-        <p:nvPicPr>
-          <p:cNvPr id="8" name="Espaço Reservado para Conteúdo 4">
-            <a:extLst>
-              <a:ext uri="{FF2B5EF4-FFF2-40B4-BE49-F238E27FC236}">
-                <a16:creationId xmlns:a16="http://schemas.microsoft.com/office/drawing/2014/main" id="{65AB402D-D1A8-4F31-BA42-34A6F0FC69F9}"/>
-              </a:ext>
-            </a:extLst>
-          </p:cNvPr>
-          <p:cNvPicPr>
-            <a:picLocks noChangeAspect="1"/>
-          </p:cNvPicPr>
-          <p:nvPr/>
-        </p:nvPicPr>
-        <p:blipFill>
-          <a:blip r:embed="rId2">
-            <a:extLst>
-              <a:ext uri="{28A0092B-C50C-407E-A947-70E740481C1C}">
-                <a14:useLocalDpi xmlns:a14="http://schemas.microsoft.com/office/drawing/2010/main" val="0"/>
-              </a:ext>
-            </a:extLst>
-          </a:blip>
-          <a:stretch>
-            <a:fillRect/>
-          </a:stretch>
-        </p:blipFill>
-        <p:spPr>
-          <a:xfrm>
-            <a:off x="62144" y="112237"/>
-            <a:ext cx="588096" cy="1228523"/>
-          </a:xfrm>
-          <a:prstGeom prst="rect">
-            <a:avLst/>
-          </a:prstGeom>
-        </p:spPr>
-      </p:pic>
     </p:spTree>
     <p:extLst>
       <p:ext uri="{BB962C8B-B14F-4D97-AF65-F5344CB8AC3E}">
-        <p14:creationId xmlns:p14="http://schemas.microsoft.com/office/powerpoint/2010/main" val="3305035525"/>
+        <p14:creationId xmlns:p14="http://schemas.microsoft.com/office/powerpoint/2010/main" val="3896344620"/>
       </p:ext>
     </p:extLst>
   </p:cSld>
@@ -11206,7 +9738,7 @@
               <a:rPr lang="pt-BR" dirty="0">
                 <a:latin typeface="AlternateGothic2 BT" panose="020B0608020202050204" pitchFamily="34" charset="0"/>
               </a:rPr>
-              <a:t>CEA055 – Estatística e Probabilidade</a:t>
+              <a:t>CEA307 – Estatística e Probabilidade</a:t>
             </a:r>
             <a:br>
               <a:rPr lang="pt-BR" dirty="0">
@@ -11215,7 +9747,7 @@
             </a:br>
             <a:r>
               <a:rPr lang="pt-BR" sz="2200" b="1" dirty="0"/>
-              <a:t>Inferência Estatística</a:t>
+              <a:t xml:space="preserve">Aula 10 - Inferência Estatística – Parte 1 </a:t>
             </a:r>
             <a:endParaRPr lang="pt-BR" dirty="0">
               <a:latin typeface="AlternateGothic2 BT" panose="020B0608020202050204" pitchFamily="34" charset="0"/>
@@ -11223,223 +9755,93 @@
           </a:p>
         </p:txBody>
       </p:sp>
-      <mc:AlternateContent xmlns:mc="http://schemas.openxmlformats.org/markup-compatibility/2006" xmlns:a14="http://schemas.microsoft.com/office/drawing/2010/main">
-        <mc:Choice Requires="a14">
-          <p:sp>
-            <p:nvSpPr>
-              <p:cNvPr id="6" name="CaixaDeTexto 5">
-                <a:extLst>
-                  <a:ext uri="{FF2B5EF4-FFF2-40B4-BE49-F238E27FC236}">
-                    <a16:creationId xmlns:a16="http://schemas.microsoft.com/office/drawing/2014/main" id="{720B10DA-C761-4DEE-8D86-E170E1C2E981}"/>
-                  </a:ext>
-                </a:extLst>
-              </p:cNvPr>
-              <p:cNvSpPr txBox="1"/>
-              <p:nvPr/>
-            </p:nvSpPr>
-            <p:spPr>
-              <a:xfrm>
-                <a:off x="650241" y="1506234"/>
-                <a:ext cx="10908714" cy="4401205"/>
-              </a:xfrm>
-              <a:prstGeom prst="rect">
-                <a:avLst/>
-              </a:prstGeom>
-              <a:noFill/>
-            </p:spPr>
-            <p:txBody>
-              <a:bodyPr wrap="square" rtlCol="0">
-                <a:spAutoFit/>
-              </a:bodyPr>
-              <a:lstStyle/>
-              <a:p>
-                <a:pPr marL="514350" indent="-514350">
-                  <a:buFont typeface="+mj-lt"/>
-                  <a:buAutoNum type="arabicParenR" startAt="3"/>
-                </a:pPr>
-                <a:r>
-                  <a:rPr lang="pt-BR" sz="2800" dirty="0"/>
-                  <a:t xml:space="preserve">Considere uma máquina que embala automaticamente café em pacotes de 500g. Digamos que </a:t>
-                </a:r>
-                <a14:m>
-                  <m:oMath xmlns:m="http://schemas.openxmlformats.org/officeDocument/2006/math">
-                    <m:r>
-                      <a:rPr lang="pt-BR" sz="2800" i="1" dirty="0" smtClean="0">
-                        <a:latin typeface="Cambria Math" panose="02040503050406030204" pitchFamily="18" charset="0"/>
-                      </a:rPr>
-                      <m:t>𝑋</m:t>
-                    </m:r>
-                  </m:oMath>
-                </a14:m>
-                <a:r>
-                  <a:rPr lang="pt-BR" sz="2800" dirty="0"/>
-                  <a:t xml:space="preserve"> represente o peso dos pacotes. Sabe-se que a distribuição de </a:t>
-                </a:r>
-                <a14:m>
-                  <m:oMath xmlns:m="http://schemas.openxmlformats.org/officeDocument/2006/math">
-                    <m:r>
-                      <a:rPr lang="pt-BR" sz="2800" i="1" dirty="0" smtClean="0">
-                        <a:latin typeface="Cambria Math" panose="02040503050406030204" pitchFamily="18" charset="0"/>
-                      </a:rPr>
-                      <m:t>𝑋</m:t>
-                    </m:r>
-                  </m:oMath>
-                </a14:m>
-                <a:r>
-                  <a:rPr lang="pt-BR" sz="2800" dirty="0"/>
-                  <a:t xml:space="preserve"> pode ser representada por uma normal, com parâmetros </a:t>
-                </a:r>
-                <a14:m>
-                  <m:oMath xmlns:m="http://schemas.openxmlformats.org/officeDocument/2006/math">
-                    <m:r>
-                      <a:rPr lang="pt-BR" sz="2800" b="0" i="1" smtClean="0">
-                        <a:latin typeface="Cambria Math" panose="02040503050406030204" pitchFamily="18" charset="0"/>
-                      </a:rPr>
-                      <m:t>𝜇</m:t>
-                    </m:r>
-                    <m:r>
-                      <a:rPr lang="pt-BR" sz="2800" b="0" i="1" smtClean="0">
-                        <a:latin typeface="Cambria Math" panose="02040503050406030204" pitchFamily="18" charset="0"/>
-                      </a:rPr>
-                      <m:t> </m:t>
-                    </m:r>
-                  </m:oMath>
-                </a14:m>
-                <a:r>
-                  <a:rPr lang="pt-BR" sz="2800" dirty="0"/>
-                  <a:t xml:space="preserve">e </a:t>
-                </a:r>
-                <a14:m>
-                  <m:oMath xmlns:m="http://schemas.openxmlformats.org/officeDocument/2006/math">
-                    <m:sSup>
-                      <m:sSupPr>
-                        <m:ctrlPr>
-                          <a:rPr lang="pt-BR" sz="2800" i="1">
-                            <a:latin typeface="Cambria Math" panose="02040503050406030204" pitchFamily="18" charset="0"/>
-                          </a:rPr>
-                        </m:ctrlPr>
-                      </m:sSupPr>
-                      <m:e>
-                        <m:r>
-                          <a:rPr lang="pt-BR" sz="2800" i="1">
-                            <a:latin typeface="Cambria Math" panose="02040503050406030204" pitchFamily="18" charset="0"/>
-                          </a:rPr>
-                          <m:t>𝜎</m:t>
-                        </m:r>
-                      </m:e>
-                      <m:sup>
-                        <m:r>
-                          <a:rPr lang="pt-BR" sz="2800" i="1">
-                            <a:latin typeface="Cambria Math" panose="02040503050406030204" pitchFamily="18" charset="0"/>
-                          </a:rPr>
-                          <m:t>2</m:t>
-                        </m:r>
-                      </m:sup>
-                    </m:sSup>
-                  </m:oMath>
-                </a14:m>
-                <a:r>
-                  <a:rPr lang="pt-BR" sz="2800" dirty="0"/>
-                  <a:t>desconhecidos. Calcularemos esses parâmetros a partir de 100 pacotes sorteados.</a:t>
-                </a:r>
-              </a:p>
-              <a:p>
-                <a:pPr marL="457200" indent="-457200">
-                  <a:buFont typeface="Arial" panose="020B0604020202020204" pitchFamily="34" charset="0"/>
-                  <a:buChar char="•"/>
-                </a:pPr>
-                <a:endParaRPr lang="pt-BR" sz="2800" dirty="0"/>
-              </a:p>
-              <a:p>
-                <a:pPr marL="457200" indent="-457200">
-                  <a:buFont typeface="Arial" panose="020B0604020202020204" pitchFamily="34" charset="0"/>
-                  <a:buChar char="•"/>
-                </a:pPr>
-                <a:r>
-                  <a:rPr lang="pt-BR" sz="2800" b="1" dirty="0"/>
-                  <a:t xml:space="preserve">A variável </a:t>
-                </a:r>
-                <a:r>
-                  <a:rPr lang="pt-BR" sz="2800" dirty="0"/>
-                  <a:t>é o peso dos pacotes (supostamente normal).</a:t>
-                </a:r>
-              </a:p>
-              <a:p>
-                <a:pPr marL="457200" indent="-457200">
-                  <a:buFont typeface="Arial" panose="020B0604020202020204" pitchFamily="34" charset="0"/>
-                  <a:buChar char="•"/>
-                </a:pPr>
-                <a:r>
-                  <a:rPr lang="pt-BR" sz="2800" b="1" dirty="0"/>
-                  <a:t xml:space="preserve">A população </a:t>
-                </a:r>
-                <a:r>
-                  <a:rPr lang="pt-BR" sz="2800" dirty="0"/>
-                  <a:t>é o conjunto de todos os pacotes enchidos ou que virão a ser enchidos pela máquina.</a:t>
-                </a:r>
-              </a:p>
-              <a:p>
-                <a:pPr marL="457200" indent="-457200">
-                  <a:buFont typeface="Arial" panose="020B0604020202020204" pitchFamily="34" charset="0"/>
-                  <a:buChar char="•"/>
-                </a:pPr>
-                <a:r>
-                  <a:rPr lang="pt-BR" sz="2800" b="1" dirty="0"/>
-                  <a:t xml:space="preserve">A amostra </a:t>
-                </a:r>
-                <a:r>
-                  <a:rPr lang="pt-BR" sz="2800" dirty="0"/>
-                  <a:t>são os 100 pacotes sorteados.</a:t>
-                </a:r>
-              </a:p>
-            </p:txBody>
-          </p:sp>
-        </mc:Choice>
-        <mc:Fallback xmlns="">
-          <p:sp>
-            <p:nvSpPr>
-              <p:cNvPr id="6" name="CaixaDeTexto 5">
-                <a:extLst>
-                  <a:ext uri="{FF2B5EF4-FFF2-40B4-BE49-F238E27FC236}">
-                    <a16:creationId xmlns:a16="http://schemas.microsoft.com/office/drawing/2014/main" id="{720B10DA-C761-4DEE-8D86-E170E1C2E981}"/>
-                  </a:ext>
-                </a:extLst>
-              </p:cNvPr>
-              <p:cNvSpPr txBox="1">
-                <a:spLocks noRot="1" noChangeAspect="1" noMove="1" noResize="1" noEditPoints="1" noAdjustHandles="1" noChangeArrowheads="1" noChangeShapeType="1" noTextEdit="1"/>
-              </p:cNvSpPr>
-              <p:nvPr/>
-            </p:nvSpPr>
-            <p:spPr>
-              <a:xfrm>
-                <a:off x="650241" y="1506234"/>
-                <a:ext cx="10908714" cy="4401205"/>
-              </a:xfrm>
-              <a:prstGeom prst="rect">
-                <a:avLst/>
-              </a:prstGeom>
-              <a:blipFill>
-                <a:blip r:embed="rId2"/>
-                <a:stretch>
-                  <a:fillRect l="-1174" t="-1524" r="-1174" b="-3047"/>
-                </a:stretch>
-              </a:blipFill>
-            </p:spPr>
-            <p:txBody>
-              <a:bodyPr/>
-              <a:lstStyle/>
-              <a:p>
-                <a:r>
-                  <a:rPr lang="pt-BR">
-                    <a:noFill/>
-                  </a:rPr>
-                  <a:t> </a:t>
-                </a:r>
-              </a:p>
-            </p:txBody>
-          </p:sp>
-        </mc:Fallback>
-      </mc:AlternateContent>
+      <p:sp>
+        <p:nvSpPr>
+          <p:cNvPr id="6" name="CaixaDeTexto 5">
+            <a:extLst>
+              <a:ext uri="{FF2B5EF4-FFF2-40B4-BE49-F238E27FC236}">
+                <a16:creationId xmlns:a16="http://schemas.microsoft.com/office/drawing/2014/main" id="{720B10DA-C761-4DEE-8D86-E170E1C2E981}"/>
+              </a:ext>
+            </a:extLst>
+          </p:cNvPr>
+          <p:cNvSpPr txBox="1"/>
+          <p:nvPr/>
+        </p:nvSpPr>
+        <p:spPr>
+          <a:xfrm>
+            <a:off x="650241" y="1506234"/>
+            <a:ext cx="10908714" cy="3539430"/>
+          </a:xfrm>
+          <a:prstGeom prst="rect">
+            <a:avLst/>
+          </a:prstGeom>
+          <a:noFill/>
+        </p:spPr>
+        <p:txBody>
+          <a:bodyPr wrap="square" rtlCol="0">
+            <a:spAutoFit/>
+          </a:bodyPr>
+          <a:lstStyle/>
+          <a:p>
+            <a:pPr marL="514350" indent="-514350">
+              <a:buFont typeface="+mj-lt"/>
+              <a:buAutoNum type="arabicParenR" startAt="2"/>
+            </a:pPr>
+            <a:r>
+              <a:rPr lang="pt-BR" sz="2800" dirty="0"/>
+              <a:t>Queremos estudar a proporção de indivíduos na cidade A que são favoráveis a certo projeto governamental. Uma amostra de 200 pessoas é sorteada, e a opinião de cada uma é registrada como sendo a favor ou contra o projeto.</a:t>
+            </a:r>
+          </a:p>
+          <a:p>
+            <a:r>
+              <a:rPr lang="pt-BR" sz="2800" dirty="0"/>
+              <a:t xml:space="preserve"> </a:t>
+            </a:r>
+          </a:p>
+          <a:p>
+            <a:pPr marL="457200" indent="-457200">
+              <a:buFont typeface="Arial" panose="020B0604020202020204" pitchFamily="34" charset="0"/>
+              <a:buChar char="•"/>
+            </a:pPr>
+            <a:r>
+              <a:rPr lang="pt-BR" sz="2800" b="1" dirty="0"/>
+              <a:t>A variável</a:t>
+            </a:r>
+            <a:r>
+              <a:rPr lang="pt-BR" sz="2800" dirty="0"/>
+              <a:t>, pode ser, X=1 (favorável) e X=0 (contrário).</a:t>
+            </a:r>
+          </a:p>
+          <a:p>
+            <a:pPr marL="457200" indent="-457200">
+              <a:buFont typeface="Arial" panose="020B0604020202020204" pitchFamily="34" charset="0"/>
+              <a:buChar char="•"/>
+            </a:pPr>
+            <a:r>
+              <a:rPr lang="pt-BR" sz="2800" b="1" dirty="0"/>
+              <a:t xml:space="preserve">A população </a:t>
+            </a:r>
+            <a:r>
+              <a:rPr lang="pt-BR" sz="2800" dirty="0"/>
+              <a:t>consiste de todos os moradores da cidade.</a:t>
+            </a:r>
+          </a:p>
+          <a:p>
+            <a:pPr marL="457200" indent="-457200">
+              <a:buFont typeface="Arial" panose="020B0604020202020204" pitchFamily="34" charset="0"/>
+              <a:buChar char="•"/>
+            </a:pPr>
+            <a:r>
+              <a:rPr lang="pt-BR" sz="2800" b="1" dirty="0"/>
+              <a:t>Amostra</a:t>
+            </a:r>
+            <a:r>
+              <a:rPr lang="pt-BR" sz="2800" dirty="0"/>
+              <a:t xml:space="preserve"> é formada pelas 200 pessoas sorteadas</a:t>
+            </a:r>
+          </a:p>
+        </p:txBody>
+      </p:sp>
       <p:sp>
         <p:nvSpPr>
           <p:cNvPr id="3" name="CaixaDeTexto 2">
@@ -11455,7 +9857,7 @@
         <p:spPr>
           <a:xfrm>
             <a:off x="361395" y="6488668"/>
-            <a:ext cx="2395336" cy="300210"/>
+            <a:ext cx="7620000" cy="300210"/>
           </a:xfrm>
           <a:prstGeom prst="rect">
             <a:avLst/>
@@ -11470,51 +9872,15 @@
           <a:p>
             <a:r>
               <a:rPr lang="pt-BR" sz="1351" dirty="0"/>
-              <a:t>Professor: Marcos Goulart Lima</a:t>
+              <a:t>CEA055 - Estatística e Probabilidade - Professor: Marcos Goulart Lima</a:t>
             </a:r>
           </a:p>
         </p:txBody>
       </p:sp>
-      <p:pic>
-        <p:nvPicPr>
-          <p:cNvPr id="8" name="Espaço Reservado para Conteúdo 4">
-            <a:extLst>
-              <a:ext uri="{FF2B5EF4-FFF2-40B4-BE49-F238E27FC236}">
-                <a16:creationId xmlns:a16="http://schemas.microsoft.com/office/drawing/2014/main" id="{65AB402D-D1A8-4F31-BA42-34A6F0FC69F9}"/>
-              </a:ext>
-            </a:extLst>
-          </p:cNvPr>
-          <p:cNvPicPr>
-            <a:picLocks noChangeAspect="1"/>
-          </p:cNvPicPr>
-          <p:nvPr/>
-        </p:nvPicPr>
-        <p:blipFill>
-          <a:blip r:embed="rId3">
-            <a:extLst>
-              <a:ext uri="{28A0092B-C50C-407E-A947-70E740481C1C}">
-                <a14:useLocalDpi xmlns:a14="http://schemas.microsoft.com/office/drawing/2010/main" val="0"/>
-              </a:ext>
-            </a:extLst>
-          </a:blip>
-          <a:stretch>
-            <a:fillRect/>
-          </a:stretch>
-        </p:blipFill>
-        <p:spPr>
-          <a:xfrm>
-            <a:off x="62144" y="112237"/>
-            <a:ext cx="588096" cy="1228523"/>
-          </a:xfrm>
-          <a:prstGeom prst="rect">
-            <a:avLst/>
-          </a:prstGeom>
-        </p:spPr>
-      </p:pic>
     </p:spTree>
     <p:extLst>
       <p:ext uri="{BB962C8B-B14F-4D97-AF65-F5344CB8AC3E}">
-        <p14:creationId xmlns:p14="http://schemas.microsoft.com/office/powerpoint/2010/main" val="3067955293"/>
+        <p14:creationId xmlns:p14="http://schemas.microsoft.com/office/powerpoint/2010/main" val="3305035525"/>
       </p:ext>
     </p:extLst>
   </p:cSld>
